--- a/画图/E2E结果.pptx
+++ b/画图/E2E结果.pptx
@@ -550,486 +550,486 @@
 </file>
 
 <file path=ppt/notesSlides/notesSlide1.xml><?xml version="1.0" encoding="utf-8"?>
-<p:notes xmlns:a="http://schemas.openxmlformats.org/drawingml/2006/main" xmlns:r="http://schemas.openxmlformats.org/officeDocument/2006/relationships" xmlns:p="http://schemas.openxmlformats.org/presentationml/2006/main">
-  <p:cSld>
-    <p:spTree>
-      <p:nvGrpSpPr>
-        <p:cNvPr id="1" name=""/>
-        <p:cNvGrpSpPr/>
-        <p:nvPr/>
-      </p:nvGrpSpPr>
-      <p:grpSpPr>
-        <a:xfrm>
-          <a:off x="0" y="0"/>
-          <a:ext cx="0" cy="0"/>
-          <a:chOff x="0" y="0"/>
-          <a:chExt cx="0" cy="0"/>
-        </a:xfrm>
-      </p:grpSpPr>
-      <p:sp>
-        <p:nvSpPr>
-          <p:cNvPr id="2" name="幻灯片图像占位符 1"/>
-          <p:cNvSpPr>
-            <a:spLocks noGrp="1" noRot="1" noChangeAspect="1"/>
-          </p:cNvSpPr>
-          <p:nvPr>
-            <p:ph type="sldImg"/>
-          </p:nvPr>
-        </p:nvSpPr>
-        <p:spPr/>
-      </p:sp>
-      <p:sp>
-        <p:nvSpPr>
-          <p:cNvPr id="3" name="备注占位符 2"/>
-          <p:cNvSpPr>
-            <a:spLocks noGrp="1"/>
-          </p:cNvSpPr>
-          <p:nvPr>
-            <p:ph type="body" idx="1"/>
-          </p:nvPr>
-        </p:nvSpPr>
-        <p:spPr/>
-        <p:txBody>
-          <a:bodyPr/>
-          <a:lstStyle/>
-          <a:p>
-            <a:r>
-              <a:rPr dirty="0"/>
-              <a:t>图 10｜一般配体的端到端区域检出与身份识别</a:t>
-            </a:r>
-            <a:r>
-              <a:rPr lang="zh-CN" altLang="en-US" dirty="0"/>
-              <a:t>。图中展示了 </a:t>
-            </a:r>
-            <a:r>
-              <a:rPr dirty="0"/>
-              <a:t>179 </a:t>
-            </a:r>
-            <a:r>
-              <a:rPr dirty="0" err="1"/>
-              <a:t>个测试</a:t>
-            </a:r>
-            <a:r>
-              <a:rPr dirty="0"/>
-              <a:t> PDB </a:t>
-            </a:r>
-            <a:r>
-              <a:rPr lang="zh-CN" altLang="en-US" dirty="0"/>
-              <a:t>在</a:t>
-            </a:r>
-            <a:r>
-              <a:rPr dirty="0"/>
-              <a:t> K </a:t>
-            </a:r>
-            <a:r>
-              <a:rPr dirty="0" err="1"/>
-              <a:t>次尝试</a:t>
-            </a:r>
-            <a:r>
-              <a:rPr lang="zh-CN" altLang="en-US" dirty="0"/>
-              <a:t>预算下</a:t>
-            </a:r>
-            <a:r>
-              <a:rPr dirty="0" err="1"/>
-              <a:t>成功</a:t>
-            </a:r>
-            <a:r>
-              <a:rPr lang="zh-CN" altLang="en-US" dirty="0"/>
-              <a:t>的 </a:t>
-            </a:r>
-            <a:r>
-              <a:rPr lang="en-US" dirty="0"/>
-              <a:t>PDB</a:t>
-            </a:r>
-            <a:r>
-              <a:rPr lang="zh-CN" altLang="en-US" dirty="0"/>
-              <a:t> 比例</a:t>
-            </a:r>
-            <a:r>
-              <a:rPr dirty="0"/>
-              <a:t>，K=1–10。Find 和 Emap2lig-Find </a:t>
-            </a:r>
-            <a:r>
-              <a:rPr lang="zh-CN" altLang="en-US" dirty="0"/>
-              <a:t>对应的曲线只考察 </a:t>
-            </a:r>
-            <a:r>
-              <a:rPr lang="en-US" altLang="zh-CN" dirty="0"/>
-              <a:t>Find </a:t>
-            </a:r>
-            <a:r>
-              <a:rPr lang="zh-CN" altLang="en-US" dirty="0"/>
-              <a:t>的预测是否正确，而 </a:t>
-            </a:r>
-            <a:r>
-              <a:rPr dirty="0" err="1"/>
-              <a:t>Find+Match</a:t>
-            </a:r>
-            <a:r>
-              <a:rPr dirty="0"/>
-              <a:t> </a:t>
-            </a:r>
-            <a:r>
-              <a:rPr lang="zh-CN" altLang="en-US" dirty="0"/>
-              <a:t>对应的曲线同时</a:t>
-            </a:r>
-            <a:r>
-              <a:rPr dirty="0" err="1"/>
-              <a:t>要求区域命中且</a:t>
-            </a:r>
-            <a:r>
-              <a:rPr lang="zh-CN" altLang="en-US" dirty="0"/>
-              <a:t>配体</a:t>
-            </a:r>
-            <a:r>
-              <a:rPr dirty="0" err="1"/>
-              <a:t>身份匹配正确。GT</a:t>
-            </a:r>
-            <a:r>
-              <a:rPr dirty="0"/>
-              <a:t> 与 CA2 </a:t>
-            </a:r>
-            <a:r>
-              <a:rPr dirty="0" err="1"/>
-              <a:t>分别</a:t>
-            </a:r>
-            <a:r>
-              <a:rPr lang="zh-CN" altLang="en-US" dirty="0"/>
-              <a:t>表示</a:t>
-            </a:r>
-            <a:r>
-              <a:rPr dirty="0" err="1"/>
-              <a:t>使用真实受体与</a:t>
-            </a:r>
-            <a:r>
-              <a:rPr dirty="0"/>
-              <a:t> CryoAtom2 </a:t>
-            </a:r>
-            <a:r>
-              <a:rPr dirty="0" err="1"/>
-              <a:t>重建受体</a:t>
-            </a:r>
-            <a:r>
-              <a:rPr lang="zh-CN" altLang="en-US" dirty="0"/>
-              <a:t>，</a:t>
-            </a:r>
-            <a:r>
-              <a:rPr dirty="0"/>
-              <a:t>Emap2lig-Find </a:t>
-            </a:r>
-            <a:r>
-              <a:rPr dirty="0" err="1"/>
-              <a:t>不使用受体</a:t>
-            </a:r>
-            <a:r>
-              <a:rPr dirty="0"/>
-              <a:t>。</a:t>
-            </a:r>
-          </a:p>
-        </p:txBody>
-      </p:sp>
-      <p:sp>
-        <p:nvSpPr>
-          <p:cNvPr id="4" name="灯片编号占位符 3"/>
-          <p:cNvSpPr>
-            <a:spLocks noGrp="1"/>
-          </p:cNvSpPr>
-          <p:nvPr>
-            <p:ph type="sldNum" sz="quarter" idx="5"/>
-          </p:nvPr>
-        </p:nvSpPr>
-        <p:spPr/>
-        <p:txBody>
-          <a:bodyPr/>
-          <a:lstStyle/>
-          <a:p>
-            <a:fld id="{662628D9-A810-41CF-BA34-6300DD38DA8D}" type="slidenum">
-              <a:rPr lang="zh-CN" altLang="en-US" smtClean="0"/>
-              <a:t>1</a:t>
-            </a:fld>
-            <a:endParaRPr lang="zh-CN" altLang="en-US"/>
-          </a:p>
-        </p:txBody>
-      </p:sp>
-    </p:spTree>
-    <p:extLst>
-      <p:ext uri="{BB962C8B-B14F-4D97-AF65-F5344CB8AC3E}">
-        <p14:creationId xmlns:p14="http://schemas.microsoft.com/office/powerpoint/2010/main" val="3700509861"/>
-      </p:ext>
-    </p:extLst>
-  </p:cSld>
-  <p:clrMapOvr>
-    <a:masterClrMapping/>
-  </p:clrMapOvr>
-</p:notes>
+<ns0:notes xmlns:ns0="http://schemas.openxmlformats.org/presentationml/2006/main" xmlns:ns1="http://schemas.openxmlformats.org/drawingml/2006/main" xmlns:ns2="http://schemas.microsoft.com/office/powerpoint/2010/main">
+  <ns0:cSld>
+    <ns0:spTree>
+      <ns0:nvGrpSpPr>
+        <ns0:cNvPr id="1" name=""/>
+        <ns0:cNvGrpSpPr/>
+        <ns0:nvPr/>
+      </ns0:nvGrpSpPr>
+      <ns0:grpSpPr>
+        <ns1:xfrm>
+          <ns1:off x="0" y="0"/>
+          <ns1:ext cx="0" cy="0"/>
+          <ns1:chOff x="0" y="0"/>
+          <ns1:chExt cx="0" cy="0"/>
+        </ns1:xfrm>
+      </ns0:grpSpPr>
+      <ns0:sp>
+        <ns0:nvSpPr>
+          <ns0:cNvPr id="2" name="幻灯片图像占位符 1"/>
+          <ns0:cNvSpPr>
+            <ns1:spLocks noGrp="1" noRot="1" noChangeAspect="1"/>
+          </ns0:cNvSpPr>
+          <ns0:nvPr>
+            <ns0:ph type="sldImg"/>
+          </ns0:nvPr>
+        </ns0:nvSpPr>
+        <ns0:spPr/>
+      </ns0:sp>
+      <ns0:sp>
+        <ns0:nvSpPr>
+          <ns0:cNvPr id="3" name="备注占位符 2"/>
+          <ns0:cNvSpPr>
+            <ns1:spLocks noGrp="1"/>
+          </ns0:cNvSpPr>
+          <ns0:nvPr>
+            <ns0:ph type="body" idx="1"/>
+          </ns0:nvPr>
+        </ns0:nvSpPr>
+        <ns0:spPr/>
+        <ns0:txBody>
+          <ns1:bodyPr/>
+          <ns1:lstStyle/>
+          <ns1:p>
+            <ns1:r>
+              <ns1:rPr dirty="0"/>
+              <ns1:t>一般配体的端到端区域检出与身份识别</ns1:t>
+            </ns1:r>
+            <ns1:r>
+              <ns1:rPr lang="zh-CN" altLang="en-US" dirty="0"/>
+              <ns1:t>。图中展示了 </ns1:t>
+            </ns1:r>
+            <ns1:r>
+              <ns1:rPr dirty="0"/>
+              <ns1:t>179 </ns1:t>
+            </ns1:r>
+            <ns1:r>
+              <ns1:rPr dirty="0" err="1"/>
+              <ns1:t>个测试</ns1:t>
+            </ns1:r>
+            <ns1:r>
+              <ns1:rPr dirty="0"/>
+              <ns1:t> PDB </ns1:t>
+            </ns1:r>
+            <ns1:r>
+              <ns1:rPr lang="zh-CN" altLang="en-US" dirty="0"/>
+              <ns1:t>在</ns1:t>
+            </ns1:r>
+            <ns1:r>
+              <ns1:rPr dirty="0"/>
+              <ns1:t> K </ns1:t>
+            </ns1:r>
+            <ns1:r>
+              <ns1:rPr dirty="0" err="1"/>
+              <ns1:t>次尝试</ns1:t>
+            </ns1:r>
+            <ns1:r>
+              <ns1:rPr lang="zh-CN" altLang="en-US" dirty="0"/>
+              <ns1:t>预算下</ns1:t>
+            </ns1:r>
+            <ns1:r>
+              <ns1:rPr dirty="0" err="1"/>
+              <ns1:t>成功</ns1:t>
+            </ns1:r>
+            <ns1:r>
+              <ns1:rPr lang="zh-CN" altLang="en-US" dirty="0"/>
+              <ns1:t>的 </ns1:t>
+            </ns1:r>
+            <ns1:r>
+              <ns1:rPr lang="en-US" dirty="0"/>
+              <ns1:t>PDB</ns1:t>
+            </ns1:r>
+            <ns1:r>
+              <ns1:rPr lang="zh-CN" altLang="en-US" dirty="0"/>
+              <ns1:t> 比例</ns1:t>
+            </ns1:r>
+            <ns1:r>
+              <ns1:rPr dirty="0"/>
+              <ns1:t>，K=1–10。Find 和 Emap2lig-Find </ns1:t>
+            </ns1:r>
+            <ns1:r>
+              <ns1:rPr lang="zh-CN" altLang="en-US" dirty="0"/>
+              <ns1:t>对应的曲线只考察 </ns1:t>
+            </ns1:r>
+            <ns1:r>
+              <ns1:rPr lang="en-US" altLang="zh-CN" dirty="0"/>
+              <ns1:t>Find </ns1:t>
+            </ns1:r>
+            <ns1:r>
+              <ns1:rPr lang="zh-CN" altLang="en-US" dirty="0"/>
+              <ns1:t>的预测是否正确，而 </ns1:t>
+            </ns1:r>
+            <ns1:r>
+              <ns1:rPr dirty="0" err="1"/>
+              <ns1:t>Find+Match</ns1:t>
+            </ns1:r>
+            <ns1:r>
+              <ns1:rPr dirty="0"/>
+              <ns1:t> </ns1:t>
+            </ns1:r>
+            <ns1:r>
+              <ns1:rPr lang="zh-CN" altLang="en-US" dirty="0"/>
+              <ns1:t>对应的曲线同时</ns1:t>
+            </ns1:r>
+            <ns1:r>
+              <ns1:rPr dirty="0" err="1"/>
+              <ns1:t>要求区域命中且</ns1:t>
+            </ns1:r>
+            <ns1:r>
+              <ns1:rPr lang="zh-CN" altLang="en-US" dirty="0"/>
+              <ns1:t>配体</ns1:t>
+            </ns1:r>
+            <ns1:r>
+              <ns1:rPr dirty="0" err="1"/>
+              <ns1:t>身份匹配正确。GT</ns1:t>
+            </ns1:r>
+            <ns1:r>
+              <ns1:rPr dirty="0"/>
+              <ns1:t> 与 CA2 </ns1:t>
+            </ns1:r>
+            <ns1:r>
+              <ns1:rPr dirty="0" err="1"/>
+              <ns1:t>分别</ns1:t>
+            </ns1:r>
+            <ns1:r>
+              <ns1:rPr lang="zh-CN" altLang="en-US" dirty="0"/>
+              <ns1:t>表示</ns1:t>
+            </ns1:r>
+            <ns1:r>
+              <ns1:rPr dirty="0" err="1"/>
+              <ns1:t>使用真实受体与</ns1:t>
+            </ns1:r>
+            <ns1:r>
+              <ns1:rPr dirty="0"/>
+              <ns1:t> CryoAtom2 </ns1:t>
+            </ns1:r>
+            <ns1:r>
+              <ns1:rPr dirty="0" err="1"/>
+              <ns1:t>重建受体</ns1:t>
+            </ns1:r>
+            <ns1:r>
+              <ns1:rPr lang="zh-CN" altLang="en-US" dirty="0"/>
+              <ns1:t>，</ns1:t>
+            </ns1:r>
+            <ns1:r>
+              <ns1:rPr dirty="0"/>
+              <ns1:t>Emap2lig-Find </ns1:t>
+            </ns1:r>
+            <ns1:r>
+              <ns1:rPr dirty="0" err="1"/>
+              <ns1:t>不使用受体</ns1:t>
+            </ns1:r>
+            <ns1:r>
+              <ns1:rPr dirty="0"/>
+              <ns1:t>。</ns1:t>
+            </ns1:r>
+          </ns1:p>
+        </ns0:txBody>
+      </ns0:sp>
+      <ns0:sp>
+        <ns0:nvSpPr>
+          <ns0:cNvPr id="4" name="灯片编号占位符 3"/>
+          <ns0:cNvSpPr>
+            <ns1:spLocks noGrp="1"/>
+          </ns0:cNvSpPr>
+          <ns0:nvPr>
+            <ns0:ph type="sldNum" sz="quarter" idx="5"/>
+          </ns0:nvPr>
+        </ns0:nvSpPr>
+        <ns0:spPr/>
+        <ns0:txBody>
+          <ns1:bodyPr/>
+          <ns1:lstStyle/>
+          <ns1:p>
+            <ns1:fld id="{662628D9-A810-41CF-BA34-6300DD38DA8D}" type="slidenum">
+              <ns1:rPr lang="zh-CN" altLang="en-US" smtClean="0"/>
+              <ns1:t>1</ns1:t>
+            </ns1:fld>
+            <ns1:endParaRPr lang="zh-CN" altLang="en-US"/>
+          </ns1:p>
+        </ns0:txBody>
+      </ns0:sp>
+    </ns0:spTree>
+    <ns0:extLst>
+      <ns0:ext uri="{BB962C8B-B14F-4D97-AF65-F5344CB8AC3E}">
+        <ns2:creationId val="3700509861"/>
+      </ns0:ext>
+    </ns0:extLst>
+  </ns0:cSld>
+  <ns0:clrMapOvr>
+    <ns1:masterClrMapping/>
+  </ns0:clrMapOvr>
+</ns0:notes>
 </file>
 
 <file path=ppt/notesSlides/notesSlide2.xml><?xml version="1.0" encoding="utf-8"?>
-<p:notes xmlns:a="http://schemas.openxmlformats.org/drawingml/2006/main" xmlns:r="http://schemas.openxmlformats.org/officeDocument/2006/relationships" xmlns:p="http://schemas.openxmlformats.org/presentationml/2006/main">
-  <p:cSld>
-    <p:spTree>
-      <p:nvGrpSpPr>
-        <p:cNvPr id="1" name=""/>
-        <p:cNvGrpSpPr/>
-        <p:nvPr/>
-      </p:nvGrpSpPr>
-      <p:grpSpPr>
-        <a:xfrm>
-          <a:off x="0" y="0"/>
-          <a:ext cx="0" cy="0"/>
-          <a:chOff x="0" y="0"/>
-          <a:chExt cx="0" cy="0"/>
-        </a:xfrm>
-      </p:grpSpPr>
-      <p:sp>
-        <p:nvSpPr>
-          <p:cNvPr id="2" name="幻灯片图像占位符 1"/>
-          <p:cNvSpPr>
-            <a:spLocks noGrp="1" noRot="1" noChangeAspect="1"/>
-          </p:cNvSpPr>
-          <p:nvPr>
-            <p:ph type="sldImg"/>
-          </p:nvPr>
-        </p:nvSpPr>
-        <p:spPr/>
-      </p:sp>
-      <p:sp>
-        <p:nvSpPr>
-          <p:cNvPr id="3" name="备注占位符 2"/>
-          <p:cNvSpPr>
-            <a:spLocks noGrp="1"/>
-          </p:cNvSpPr>
-          <p:nvPr>
-            <p:ph type="body" idx="1"/>
-          </p:nvPr>
-        </p:nvSpPr>
-        <p:spPr/>
-        <p:txBody>
-          <a:bodyPr/>
-          <a:lstStyle/>
-          <a:p>
-            <a:r>
-              <a:rPr dirty="0"/>
-              <a:t>图 11｜单残基无缺失原子的有机小分子的端到端建模。a，</a:t>
-            </a:r>
-            <a:r>
-              <a:rPr lang="en-US" altLang="zh-CN" dirty="0"/>
-              <a:t>Find </a:t>
-            </a:r>
-            <a:r>
-              <a:rPr lang="zh-CN" altLang="en-US" dirty="0"/>
-              <a:t>对应的曲线只考察 </a:t>
-            </a:r>
-            <a:r>
-              <a:rPr lang="en-US" altLang="zh-CN" dirty="0"/>
-              <a:t>Find </a:t>
-            </a:r>
-            <a:r>
-              <a:rPr lang="zh-CN" altLang="en-US" dirty="0"/>
-              <a:t>的预测是否正确，而 </a:t>
-            </a:r>
-            <a:r>
-              <a:rPr dirty="0" err="1"/>
-              <a:t>Find+Match</a:t>
-            </a:r>
-            <a:r>
-              <a:rPr dirty="0"/>
-              <a:t> </a:t>
-            </a:r>
-            <a:r>
-              <a:rPr lang="zh-CN" altLang="en-US" dirty="0"/>
-              <a:t>对应的曲线要求区域命中且配体身份匹配正确。</a:t>
-            </a:r>
-            <a:r>
-              <a:rPr dirty="0" err="1"/>
-              <a:t>b、c，分别</a:t>
-            </a:r>
-            <a:r>
-              <a:rPr lang="zh-CN" altLang="en-US" dirty="0"/>
-              <a:t>显示</a:t>
-            </a:r>
-            <a:r>
-              <a:rPr dirty="0"/>
-              <a:t>在</a:t>
-            </a:r>
-            <a:r>
-              <a:rPr lang="zh-CN" altLang="en-US" dirty="0"/>
-              <a:t>真实受体条件下</a:t>
-            </a:r>
-            <a:r>
-              <a:rPr dirty="0"/>
-              <a:t> 与 </a:t>
-            </a:r>
-            <a:r>
-              <a:rPr lang="en-US" dirty="0"/>
-              <a:t>CryoAtom2 </a:t>
-            </a:r>
-            <a:r>
-              <a:rPr lang="zh-CN" altLang="en-US" dirty="0"/>
-              <a:t>重建受体</a:t>
-            </a:r>
-            <a:r>
-              <a:rPr dirty="0" err="1"/>
-              <a:t>条件下使用</a:t>
-            </a:r>
-            <a:r>
-              <a:rPr dirty="0"/>
-              <a:t> </a:t>
-            </a:r>
-            <a:r>
-              <a:rPr dirty="0" err="1"/>
-              <a:t>PocketXMol</a:t>
-            </a:r>
-            <a:r>
-              <a:rPr dirty="0"/>
-              <a:t>-tuned </a:t>
-            </a:r>
-            <a:r>
-              <a:rPr dirty="0" err="1"/>
-              <a:t>重建构象</a:t>
-            </a:r>
-            <a:r>
-              <a:rPr lang="zh-CN" altLang="en-US" dirty="0"/>
-              <a:t>时的 </a:t>
-            </a:r>
-            <a:r>
-              <a:rPr lang="en-US" altLang="zh-CN" dirty="0"/>
-              <a:t>top-K </a:t>
-            </a:r>
-            <a:r>
-              <a:rPr lang="zh-CN" altLang="en-US" dirty="0"/>
-              <a:t>成功率</a:t>
-            </a:r>
-            <a:r>
-              <a:rPr dirty="0"/>
-              <a:t>。</a:t>
-            </a:r>
-            <a:r>
-              <a:rPr dirty="0" err="1"/>
-              <a:t>实线为</a:t>
-            </a:r>
-            <a:r>
-              <a:rPr dirty="0"/>
-              <a:t> top-1 </a:t>
-            </a:r>
-            <a:r>
-              <a:rPr dirty="0" err="1"/>
-              <a:t>pose，虚线为</a:t>
-            </a:r>
-            <a:r>
-              <a:rPr dirty="0"/>
-              <a:t> best-of-50 </a:t>
-            </a:r>
-            <a:r>
-              <a:rPr dirty="0" err="1"/>
-              <a:t>pose；成功阈值为重原子</a:t>
-            </a:r>
-            <a:r>
-              <a:rPr dirty="0"/>
-              <a:t> RMSD &lt;2 Å 或 &lt;3 </a:t>
-            </a:r>
-            <a:r>
-              <a:rPr dirty="0" err="1"/>
-              <a:t>Å。横轴为计费尝试次数</a:t>
-            </a:r>
-            <a:r>
-              <a:rPr dirty="0"/>
-              <a:t> </a:t>
-            </a:r>
-            <a:r>
-              <a:rPr dirty="0" err="1"/>
-              <a:t>K，纵轴</a:t>
-            </a:r>
-            <a:r>
-              <a:rPr lang="zh-CN" altLang="en-US" dirty="0"/>
-              <a:t>为</a:t>
-            </a:r>
-            <a:r>
-              <a:rPr dirty="0"/>
-              <a:t> K </a:t>
-            </a:r>
-            <a:r>
-              <a:rPr dirty="0" err="1"/>
-              <a:t>次尝试</a:t>
-            </a:r>
-            <a:r>
-              <a:rPr lang="zh-CN" altLang="en-US" dirty="0"/>
-              <a:t>预算下成功</a:t>
-            </a:r>
-            <a:r>
-              <a:rPr dirty="0"/>
-              <a:t>的 PDB </a:t>
-            </a:r>
-            <a:r>
-              <a:rPr dirty="0" err="1"/>
-              <a:t>比例。</a:t>
-            </a:r>
-            <a:r>
-              <a:rPr lang="en-US" altLang="zh-CN" dirty="0" err="1"/>
-              <a:t>GT</a:t>
-            </a:r>
-            <a:r>
-              <a:rPr lang="en-US" altLang="zh-CN" dirty="0"/>
-              <a:t> </a:t>
-            </a:r>
-            <a:r>
-              <a:rPr lang="zh-CN" altLang="en-US" dirty="0"/>
-              <a:t>与 </a:t>
-            </a:r>
-            <a:r>
-              <a:rPr lang="en-US" altLang="zh-CN" dirty="0"/>
-              <a:t>CA2 </a:t>
-            </a:r>
-            <a:r>
-              <a:rPr lang="zh-CN" altLang="en-US" dirty="0"/>
-              <a:t>分别表示使用真实受体与 </a:t>
-            </a:r>
-            <a:r>
-              <a:rPr lang="en-US" altLang="zh-CN" dirty="0"/>
-              <a:t>CryoAtom2 </a:t>
-            </a:r>
-            <a:r>
-              <a:rPr lang="zh-CN" altLang="en-US" dirty="0"/>
-              <a:t>重建受体。</a:t>
-            </a:r>
-            <a:endParaRPr dirty="0"/>
-          </a:p>
-        </p:txBody>
-      </p:sp>
-      <p:sp>
-        <p:nvSpPr>
-          <p:cNvPr id="4" name="灯片编号占位符 3"/>
-          <p:cNvSpPr>
-            <a:spLocks noGrp="1"/>
-          </p:cNvSpPr>
-          <p:nvPr>
-            <p:ph type="sldNum" sz="quarter" idx="5"/>
-          </p:nvPr>
-        </p:nvSpPr>
-        <p:spPr/>
-        <p:txBody>
-          <a:bodyPr/>
-          <a:lstStyle/>
-          <a:p>
-            <a:fld id="{8DDC8409-929D-466A-A2CD-CAE0966F44C1}" type="slidenum">
-              <a:rPr lang="zh-CN" altLang="en-US" smtClean="0"/>
-              <a:t>2</a:t>
-            </a:fld>
-            <a:endParaRPr lang="zh-CN" altLang="en-US"/>
-          </a:p>
-        </p:txBody>
-      </p:sp>
-    </p:spTree>
-    <p:extLst>
-      <p:ext uri="{BB962C8B-B14F-4D97-AF65-F5344CB8AC3E}">
-        <p14:creationId xmlns:p14="http://schemas.microsoft.com/office/powerpoint/2010/main" val="1270214165"/>
-      </p:ext>
-    </p:extLst>
-  </p:cSld>
-  <p:clrMapOvr>
-    <a:masterClrMapping/>
-  </p:clrMapOvr>
-</p:notes>
+<ns0:notes xmlns:ns0="http://schemas.openxmlformats.org/presentationml/2006/main" xmlns:ns1="http://schemas.openxmlformats.org/drawingml/2006/main" xmlns:ns2="http://schemas.microsoft.com/office/powerpoint/2010/main">
+  <ns0:cSld>
+    <ns0:spTree>
+      <ns0:nvGrpSpPr>
+        <ns0:cNvPr id="1" name=""/>
+        <ns0:cNvGrpSpPr/>
+        <ns0:nvPr/>
+      </ns0:nvGrpSpPr>
+      <ns0:grpSpPr>
+        <ns1:xfrm>
+          <ns1:off x="0" y="0"/>
+          <ns1:ext cx="0" cy="0"/>
+          <ns1:chOff x="0" y="0"/>
+          <ns1:chExt cx="0" cy="0"/>
+        </ns1:xfrm>
+      </ns0:grpSpPr>
+      <ns0:sp>
+        <ns0:nvSpPr>
+          <ns0:cNvPr id="2" name="幻灯片图像占位符 1"/>
+          <ns0:cNvSpPr>
+            <ns1:spLocks noGrp="1" noRot="1" noChangeAspect="1"/>
+          </ns0:cNvSpPr>
+          <ns0:nvPr>
+            <ns0:ph type="sldImg"/>
+          </ns0:nvPr>
+        </ns0:nvSpPr>
+        <ns0:spPr/>
+      </ns0:sp>
+      <ns0:sp>
+        <ns0:nvSpPr>
+          <ns0:cNvPr id="3" name="备注占位符 2"/>
+          <ns0:cNvSpPr>
+            <ns1:spLocks noGrp="1"/>
+          </ns0:cNvSpPr>
+          <ns0:nvPr>
+            <ns0:ph type="body" idx="1"/>
+          </ns0:nvPr>
+        </ns0:nvSpPr>
+        <ns0:spPr/>
+        <ns0:txBody>
+          <ns1:bodyPr/>
+          <ns1:lstStyle/>
+          <ns1:p>
+            <ns1:r>
+              <ns1:rPr dirty="0"/>
+              <ns1:t>单残基无缺失原子的有机小分子的端到端建模。a，</ns1:t>
+            </ns1:r>
+            <ns1:r>
+              <ns1:rPr lang="en-US" altLang="zh-CN" dirty="0"/>
+              <ns1:t>Find </ns1:t>
+            </ns1:r>
+            <ns1:r>
+              <ns1:rPr lang="zh-CN" altLang="en-US" dirty="0"/>
+              <ns1:t>对应的曲线只考察 </ns1:t>
+            </ns1:r>
+            <ns1:r>
+              <ns1:rPr lang="en-US" altLang="zh-CN" dirty="0"/>
+              <ns1:t>Find </ns1:t>
+            </ns1:r>
+            <ns1:r>
+              <ns1:rPr lang="zh-CN" altLang="en-US" dirty="0"/>
+              <ns1:t>的预测是否正确，而 </ns1:t>
+            </ns1:r>
+            <ns1:r>
+              <ns1:rPr dirty="0" err="1"/>
+              <ns1:t>Find+Match</ns1:t>
+            </ns1:r>
+            <ns1:r>
+              <ns1:rPr dirty="0"/>
+              <ns1:t> </ns1:t>
+            </ns1:r>
+            <ns1:r>
+              <ns1:rPr lang="zh-CN" altLang="en-US" dirty="0"/>
+              <ns1:t>对应的曲线要求区域命中且配体身份匹配正确。</ns1:t>
+            </ns1:r>
+            <ns1:r>
+              <ns1:rPr dirty="0" err="1"/>
+              <ns1:t>b、c，分别</ns1:t>
+            </ns1:r>
+            <ns1:r>
+              <ns1:rPr lang="zh-CN" altLang="en-US" dirty="0"/>
+              <ns1:t>显示</ns1:t>
+            </ns1:r>
+            <ns1:r>
+              <ns1:rPr dirty="0"/>
+              <ns1:t>在</ns1:t>
+            </ns1:r>
+            <ns1:r>
+              <ns1:rPr lang="zh-CN" altLang="en-US" dirty="0"/>
+              <ns1:t>真实受体条件下</ns1:t>
+            </ns1:r>
+            <ns1:r>
+              <ns1:rPr dirty="0"/>
+              <ns1:t> 与 </ns1:t>
+            </ns1:r>
+            <ns1:r>
+              <ns1:rPr lang="en-US" dirty="0"/>
+              <ns1:t>CryoAtom2 </ns1:t>
+            </ns1:r>
+            <ns1:r>
+              <ns1:rPr lang="zh-CN" altLang="en-US" dirty="0"/>
+              <ns1:t>重建受体</ns1:t>
+            </ns1:r>
+            <ns1:r>
+              <ns1:rPr dirty="0" err="1"/>
+              <ns1:t>条件下使用</ns1:t>
+            </ns1:r>
+            <ns1:r>
+              <ns1:rPr dirty="0"/>
+              <ns1:t> </ns1:t>
+            </ns1:r>
+            <ns1:r>
+              <ns1:rPr dirty="0" err="1"/>
+              <ns1:t>PocketXMol</ns1:t>
+            </ns1:r>
+            <ns1:r>
+              <ns1:rPr dirty="0"/>
+              <ns1:t>-tuned </ns1:t>
+            </ns1:r>
+            <ns1:r>
+              <ns1:rPr dirty="0" err="1"/>
+              <ns1:t>重建构象</ns1:t>
+            </ns1:r>
+            <ns1:r>
+              <ns1:rPr lang="zh-CN" altLang="en-US" dirty="0"/>
+              <ns1:t>时的 </ns1:t>
+            </ns1:r>
+            <ns1:r>
+              <ns1:rPr lang="en-US" altLang="zh-CN" dirty="0"/>
+              <ns1:t>top-K </ns1:t>
+            </ns1:r>
+            <ns1:r>
+              <ns1:rPr lang="zh-CN" altLang="en-US" dirty="0"/>
+              <ns1:t>成功率</ns1:t>
+            </ns1:r>
+            <ns1:r>
+              <ns1:rPr dirty="0"/>
+              <ns1:t>。</ns1:t>
+            </ns1:r>
+            <ns1:r>
+              <ns1:rPr dirty="0" err="1"/>
+              <ns1:t>实线为</ns1:t>
+            </ns1:r>
+            <ns1:r>
+              <ns1:rPr dirty="0"/>
+              <ns1:t> top-1 </ns1:t>
+            </ns1:r>
+            <ns1:r>
+              <ns1:rPr dirty="0" err="1"/>
+              <ns1:t>pose，虚线为</ns1:t>
+            </ns1:r>
+            <ns1:r>
+              <ns1:rPr dirty="0"/>
+              <ns1:t> best-of-50 </ns1:t>
+            </ns1:r>
+            <ns1:r>
+              <ns1:rPr dirty="0" err="1"/>
+              <ns1:t>pose；成功阈值为重原子</ns1:t>
+            </ns1:r>
+            <ns1:r>
+              <ns1:rPr dirty="0"/>
+              <ns1:t> RMSD &lt;2 Å 或 &lt;3 </ns1:t>
+            </ns1:r>
+            <ns1:r>
+              <ns1:rPr dirty="0" err="1"/>
+              <ns1:t>Å。横轴为计费尝试次数</ns1:t>
+            </ns1:r>
+            <ns1:r>
+              <ns1:rPr dirty="0"/>
+              <ns1:t> </ns1:t>
+            </ns1:r>
+            <ns1:r>
+              <ns1:rPr dirty="0" err="1"/>
+              <ns1:t>K，纵轴</ns1:t>
+            </ns1:r>
+            <ns1:r>
+              <ns1:rPr lang="zh-CN" altLang="en-US" dirty="0"/>
+              <ns1:t>为</ns1:t>
+            </ns1:r>
+            <ns1:r>
+              <ns1:rPr dirty="0"/>
+              <ns1:t> K </ns1:t>
+            </ns1:r>
+            <ns1:r>
+              <ns1:rPr dirty="0" err="1"/>
+              <ns1:t>次尝试</ns1:t>
+            </ns1:r>
+            <ns1:r>
+              <ns1:rPr lang="zh-CN" altLang="en-US" dirty="0"/>
+              <ns1:t>预算下成功</ns1:t>
+            </ns1:r>
+            <ns1:r>
+              <ns1:rPr dirty="0"/>
+              <ns1:t>的 PDB </ns1:t>
+            </ns1:r>
+            <ns1:r>
+              <ns1:rPr dirty="0" err="1"/>
+              <ns1:t>比例。</ns1:t>
+            </ns1:r>
+            <ns1:r>
+              <ns1:rPr lang="en-US" altLang="zh-CN" dirty="0" err="1"/>
+              <ns1:t>GT</ns1:t>
+            </ns1:r>
+            <ns1:r>
+              <ns1:rPr lang="en-US" altLang="zh-CN" dirty="0"/>
+              <ns1:t> </ns1:t>
+            </ns1:r>
+            <ns1:r>
+              <ns1:rPr lang="zh-CN" altLang="en-US" dirty="0"/>
+              <ns1:t>与 </ns1:t>
+            </ns1:r>
+            <ns1:r>
+              <ns1:rPr lang="en-US" altLang="zh-CN" dirty="0"/>
+              <ns1:t>CA2 </ns1:t>
+            </ns1:r>
+            <ns1:r>
+              <ns1:rPr lang="zh-CN" altLang="en-US" dirty="0"/>
+              <ns1:t>分别表示使用真实受体与 </ns1:t>
+            </ns1:r>
+            <ns1:r>
+              <ns1:rPr lang="en-US" altLang="zh-CN" dirty="0"/>
+              <ns1:t>CryoAtom2 </ns1:t>
+            </ns1:r>
+            <ns1:r>
+              <ns1:rPr lang="zh-CN" altLang="en-US" dirty="0"/>
+              <ns1:t>重建受体。</ns1:t>
+            </ns1:r>
+            <ns1:endParaRPr dirty="0"/>
+          </ns1:p>
+        </ns0:txBody>
+      </ns0:sp>
+      <ns0:sp>
+        <ns0:nvSpPr>
+          <ns0:cNvPr id="4" name="灯片编号占位符 3"/>
+          <ns0:cNvSpPr>
+            <ns1:spLocks noGrp="1"/>
+          </ns0:cNvSpPr>
+          <ns0:nvPr>
+            <ns0:ph type="sldNum" sz="quarter" idx="5"/>
+          </ns0:nvPr>
+        </ns0:nvSpPr>
+        <ns0:spPr/>
+        <ns0:txBody>
+          <ns1:bodyPr/>
+          <ns1:lstStyle/>
+          <ns1:p>
+            <ns1:fld id="{8DDC8409-929D-466A-A2CD-CAE0966F44C1}" type="slidenum">
+              <ns1:rPr lang="zh-CN" altLang="en-US" smtClean="0"/>
+              <ns1:t>2</ns1:t>
+            </ns1:fld>
+            <ns1:endParaRPr lang="zh-CN" altLang="en-US"/>
+          </ns1:p>
+        </ns0:txBody>
+      </ns0:sp>
+    </ns0:spTree>
+    <ns0:extLst>
+      <ns0:ext uri="{BB962C8B-B14F-4D97-AF65-F5344CB8AC3E}">
+        <ns2:creationId val="1270214165"/>
+      </ns0:ext>
+    </ns0:extLst>
+  </ns0:cSld>
+  <ns0:clrMapOvr>
+    <ns1:masterClrMapping/>
+  </ns0:clrMapOvr>
+</ns0:notes>
 </file>
 
 <file path=ppt/slideLayouts/slideLayout1.xml><?xml version="1.0" encoding="utf-8"?>

--- a/画图/E2E结果.pptx
+++ b/画图/E2E结果.pptx
@@ -726,6 +726,16 @@
               <ns1:t>。</ns1:t>
             </ns1:r>
           </ns1:p>
+          <ns1:p>
+            <ns1:r>
+              <ns1:t>ENGLISH:</ns1:t>
+            </ns1:r>
+          </ns1:p>
+          <ns1:p>
+            <ns1:r>
+              <ns1:t>End-to-end ligand-region detection and identity matching. The curves show the percentage of 179 test PDB entries with successful predictions within an attempt budget of $K$, for $K=1$–$10$. Find and Match denote LigandSeek-Find and LigandSeek-Match, respectively, within the LigandSeek framework. Find and Emap2lig-Find curves require correct region detection; Find+Match curves additionally require correct ligand identity matching. GT denotes deposited receptor structures, and CA2 denotes CryoAtom2-reconstructed receptor structures; Emap2lig-Find uses no receptor input.</ns1:t>
+            </ns1:r>
+          </ns1:p>
         </ns0:txBody>
       </ns0:sp>
       <ns0:sp>
@@ -993,6 +1003,26 @@
               <ns1:t>重建受体。</ns1:t>
             </ns1:r>
             <ns1:endParaRPr dirty="0"/>
+          </ns1:p>
+          <ns1:p>
+            <ns1:r>
+              <ns1:t>ENGLISH:</ns1:t>
+            </ns1:r>
+          </ns1:p>
+          <ns1:p>
+            <ns1:r>
+              <ns1:t>End-to-end modelling of single-residue organic small molecules with no missing atoms. The evaluation includes 77 PDB entries containing these small molecules. Find and Match denote LigandSeek-Find and LigandSeek-Match, respectively, within the LigandSeek framework.</ns1:t>
+            </ns1:r>
+          </ns1:p>
+          <ns1:p>
+            <ns1:r>
+              <ns1:t>a, Find curves require correct region detection, whereas Find+Match curves require both correct region detection and correct ligand identity matching.</ns1:t>
+            </ns1:r>
+          </ns1:p>
+          <ns1:p>
+            <ns1:r>
+              <ns1:t>b, c, Top-K success rates for pose reconstruction with PocketXMol-tuned using deposited and CryoAtom2-reconstructed receptor structures, respectively. Success requires a heavy-atom root-mean-square deviation (RMSD) below 2 Å or 3 Å. Solid lines show top-1 poses selected by model score; dashed lines show best-of-50 poses, selected as the lowest heavy-atom RMSD among 50 candidates. The horizontal axis shows charged attempts $K$; the vertical axis shows the percentage of PDB entries with successful predictions within that budget. GT and CA2 denote deposited and CryoAtom2-reconstructed receptor structures, respectively.</ns1:t>
+            </ns1:r>
           </ns1:p>
         </ns0:txBody>
       </ns0:sp>

--- a/画图/E2E结果.pptx
+++ b/画图/E2E结果.pptx
@@ -282,7 +282,7 @@
           <a:p>
             <a:fld id="{E1A40E6D-81F6-4F1C-843E-41060F95F2BE}" type="datetimeFigureOut">
               <a:rPr lang="zh-CN" altLang="en-US" smtClean="0"/>
-              <a:t>2026/10/4</a:t>
+              <a:t>2026/10/7</a:t>
             </a:fld>
             <a:endParaRPr lang="zh-CN" altLang="en-US"/>
           </a:p>
@@ -550,516 +550,591 @@
 </file>
 
 <file path=ppt/notesSlides/notesSlide1.xml><?xml version="1.0" encoding="utf-8"?>
-<ns0:notes xmlns:ns0="http://schemas.openxmlformats.org/presentationml/2006/main" xmlns:ns1="http://schemas.openxmlformats.org/drawingml/2006/main" xmlns:ns2="http://schemas.microsoft.com/office/powerpoint/2010/main">
-  <ns0:cSld>
-    <ns0:spTree>
-      <ns0:nvGrpSpPr>
-        <ns0:cNvPr id="1" name=""/>
-        <ns0:cNvGrpSpPr/>
-        <ns0:nvPr/>
-      </ns0:nvGrpSpPr>
-      <ns0:grpSpPr>
-        <ns1:xfrm>
-          <ns1:off x="0" y="0"/>
-          <ns1:ext cx="0" cy="0"/>
-          <ns1:chOff x="0" y="0"/>
-          <ns1:chExt cx="0" cy="0"/>
-        </ns1:xfrm>
-      </ns0:grpSpPr>
-      <ns0:sp>
-        <ns0:nvSpPr>
-          <ns0:cNvPr id="2" name="幻灯片图像占位符 1"/>
-          <ns0:cNvSpPr>
-            <ns1:spLocks noGrp="1" noRot="1" noChangeAspect="1"/>
-          </ns0:cNvSpPr>
-          <ns0:nvPr>
-            <ns0:ph type="sldImg"/>
-          </ns0:nvPr>
-        </ns0:nvSpPr>
-        <ns0:spPr/>
-      </ns0:sp>
-      <ns0:sp>
-        <ns0:nvSpPr>
-          <ns0:cNvPr id="3" name="备注占位符 2"/>
-          <ns0:cNvSpPr>
-            <ns1:spLocks noGrp="1"/>
-          </ns0:cNvSpPr>
-          <ns0:nvPr>
-            <ns0:ph type="body" idx="1"/>
-          </ns0:nvPr>
-        </ns0:nvSpPr>
-        <ns0:spPr/>
-        <ns0:txBody>
-          <ns1:bodyPr/>
-          <ns1:lstStyle/>
-          <ns1:p>
-            <ns1:r>
-              <ns1:rPr dirty="0"/>
-              <ns1:t>一般配体的端到端区域检出与身份识别</ns1:t>
-            </ns1:r>
-            <ns1:r>
-              <ns1:rPr lang="zh-CN" altLang="en-US" dirty="0"/>
-              <ns1:t>。图中展示了 </ns1:t>
-            </ns1:r>
-            <ns1:r>
-              <ns1:rPr dirty="0"/>
-              <ns1:t>179 </ns1:t>
-            </ns1:r>
-            <ns1:r>
-              <ns1:rPr dirty="0" err="1"/>
-              <ns1:t>个测试</ns1:t>
-            </ns1:r>
-            <ns1:r>
-              <ns1:rPr dirty="0"/>
-              <ns1:t> PDB </ns1:t>
-            </ns1:r>
-            <ns1:r>
-              <ns1:rPr lang="zh-CN" altLang="en-US" dirty="0"/>
-              <ns1:t>在</ns1:t>
-            </ns1:r>
-            <ns1:r>
-              <ns1:rPr dirty="0"/>
-              <ns1:t> K </ns1:t>
-            </ns1:r>
-            <ns1:r>
-              <ns1:rPr dirty="0" err="1"/>
-              <ns1:t>次尝试</ns1:t>
-            </ns1:r>
-            <ns1:r>
-              <ns1:rPr lang="zh-CN" altLang="en-US" dirty="0"/>
-              <ns1:t>预算下</ns1:t>
-            </ns1:r>
-            <ns1:r>
-              <ns1:rPr dirty="0" err="1"/>
-              <ns1:t>成功</ns1:t>
-            </ns1:r>
-            <ns1:r>
-              <ns1:rPr lang="zh-CN" altLang="en-US" dirty="0"/>
-              <ns1:t>的 </ns1:t>
-            </ns1:r>
-            <ns1:r>
-              <ns1:rPr lang="en-US" dirty="0"/>
-              <ns1:t>PDB</ns1:t>
-            </ns1:r>
-            <ns1:r>
-              <ns1:rPr lang="zh-CN" altLang="en-US" dirty="0"/>
-              <ns1:t> 比例</ns1:t>
-            </ns1:r>
-            <ns1:r>
-              <ns1:rPr dirty="0"/>
-              <ns1:t>，K=1–10。Find 和 Emap2lig-Find </ns1:t>
-            </ns1:r>
-            <ns1:r>
-              <ns1:rPr lang="zh-CN" altLang="en-US" dirty="0"/>
-              <ns1:t>对应的曲线只考察 </ns1:t>
-            </ns1:r>
-            <ns1:r>
-              <ns1:rPr lang="en-US" altLang="zh-CN" dirty="0"/>
-              <ns1:t>Find </ns1:t>
-            </ns1:r>
-            <ns1:r>
-              <ns1:rPr lang="zh-CN" altLang="en-US" dirty="0"/>
-              <ns1:t>的预测是否正确，而 </ns1:t>
-            </ns1:r>
-            <ns1:r>
-              <ns1:rPr dirty="0" err="1"/>
-              <ns1:t>Find+Match</ns1:t>
-            </ns1:r>
-            <ns1:r>
-              <ns1:rPr dirty="0"/>
-              <ns1:t> </ns1:t>
-            </ns1:r>
-            <ns1:r>
-              <ns1:rPr lang="zh-CN" altLang="en-US" dirty="0"/>
-              <ns1:t>对应的曲线同时</ns1:t>
-            </ns1:r>
-            <ns1:r>
-              <ns1:rPr dirty="0" err="1"/>
-              <ns1:t>要求区域命中且</ns1:t>
-            </ns1:r>
-            <ns1:r>
-              <ns1:rPr lang="zh-CN" altLang="en-US" dirty="0"/>
-              <ns1:t>配体</ns1:t>
-            </ns1:r>
-            <ns1:r>
-              <ns1:rPr dirty="0" err="1"/>
-              <ns1:t>身份匹配正确。GT</ns1:t>
-            </ns1:r>
-            <ns1:r>
-              <ns1:rPr dirty="0"/>
-              <ns1:t> 与 CA2 </ns1:t>
-            </ns1:r>
-            <ns1:r>
-              <ns1:rPr dirty="0" err="1"/>
-              <ns1:t>分别</ns1:t>
-            </ns1:r>
-            <ns1:r>
-              <ns1:rPr lang="zh-CN" altLang="en-US" dirty="0"/>
-              <ns1:t>表示</ns1:t>
-            </ns1:r>
-            <ns1:r>
-              <ns1:rPr dirty="0" err="1"/>
-              <ns1:t>使用真实受体与</ns1:t>
-            </ns1:r>
-            <ns1:r>
-              <ns1:rPr dirty="0"/>
-              <ns1:t> CryoAtom2 </ns1:t>
-            </ns1:r>
-            <ns1:r>
-              <ns1:rPr dirty="0" err="1"/>
-              <ns1:t>重建受体</ns1:t>
-            </ns1:r>
-            <ns1:r>
-              <ns1:rPr lang="zh-CN" altLang="en-US" dirty="0"/>
-              <ns1:t>，</ns1:t>
-            </ns1:r>
-            <ns1:r>
-              <ns1:rPr dirty="0"/>
-              <ns1:t>Emap2lig-Find </ns1:t>
-            </ns1:r>
-            <ns1:r>
-              <ns1:rPr dirty="0" err="1"/>
-              <ns1:t>不使用受体</ns1:t>
-            </ns1:r>
-            <ns1:r>
-              <ns1:rPr dirty="0"/>
-              <ns1:t>。</ns1:t>
-            </ns1:r>
-          </ns1:p>
-          <ns1:p>
-            <ns1:r>
-              <ns1:t>ENGLISH:</ns1:t>
-            </ns1:r>
-          </ns1:p>
-          <ns1:p>
-            <ns1:r>
-              <ns1:t>End-to-end ligand-region detection and identity matching. The curves show the percentage of 179 test PDB entries with successful predictions within an attempt budget of $K$, for $K=1$–$10$. Find and Match denote LigandSeek-Find and LigandSeek-Match, respectively, within the LigandSeek framework. Find and Emap2lig-Find curves require correct region detection; Find+Match curves additionally require correct ligand identity matching. GT denotes deposited receptor structures, and CA2 denotes CryoAtom2-reconstructed receptor structures; Emap2lig-Find uses no receptor input.</ns1:t>
-            </ns1:r>
-          </ns1:p>
-        </ns0:txBody>
-      </ns0:sp>
-      <ns0:sp>
-        <ns0:nvSpPr>
-          <ns0:cNvPr id="4" name="灯片编号占位符 3"/>
-          <ns0:cNvSpPr>
-            <ns1:spLocks noGrp="1"/>
-          </ns0:cNvSpPr>
-          <ns0:nvPr>
-            <ns0:ph type="sldNum" sz="quarter" idx="5"/>
-          </ns0:nvPr>
-        </ns0:nvSpPr>
-        <ns0:spPr/>
-        <ns0:txBody>
-          <ns1:bodyPr/>
-          <ns1:lstStyle/>
-          <ns1:p>
-            <ns1:fld id="{662628D9-A810-41CF-BA34-6300DD38DA8D}" type="slidenum">
-              <ns1:rPr lang="zh-CN" altLang="en-US" smtClean="0"/>
-              <ns1:t>1</ns1:t>
-            </ns1:fld>
-            <ns1:endParaRPr lang="zh-CN" altLang="en-US"/>
-          </ns1:p>
-        </ns0:txBody>
-      </ns0:sp>
-    </ns0:spTree>
-    <ns0:extLst>
-      <ns0:ext uri="{BB962C8B-B14F-4D97-AF65-F5344CB8AC3E}">
-        <ns2:creationId val="3700509861"/>
-      </ns0:ext>
-    </ns0:extLst>
-  </ns0:cSld>
-  <ns0:clrMapOvr>
-    <ns1:masterClrMapping/>
-  </ns0:clrMapOvr>
-</ns0:notes>
+<p:notes xmlns:a="http://schemas.openxmlformats.org/drawingml/2006/main" xmlns:r="http://schemas.openxmlformats.org/officeDocument/2006/relationships" xmlns:p="http://schemas.openxmlformats.org/presentationml/2006/main">
+  <p:cSld>
+    <p:spTree>
+      <p:nvGrpSpPr>
+        <p:cNvPr id="1" name=""/>
+        <p:cNvGrpSpPr/>
+        <p:nvPr/>
+      </p:nvGrpSpPr>
+      <p:grpSpPr>
+        <a:xfrm>
+          <a:off x="0" y="0"/>
+          <a:ext cx="0" cy="0"/>
+          <a:chOff x="0" y="0"/>
+          <a:chExt cx="0" cy="0"/>
+        </a:xfrm>
+      </p:grpSpPr>
+      <p:sp>
+        <p:nvSpPr>
+          <p:cNvPr id="2" name="幻灯片图像占位符 1"/>
+          <p:cNvSpPr>
+            <a:spLocks noGrp="1" noRot="1" noChangeAspect="1"/>
+          </p:cNvSpPr>
+          <p:nvPr>
+            <p:ph type="sldImg"/>
+          </p:nvPr>
+        </p:nvSpPr>
+        <p:spPr/>
+      </p:sp>
+      <p:sp>
+        <p:nvSpPr>
+          <p:cNvPr id="3" name="备注占位符 2"/>
+          <p:cNvSpPr>
+            <a:spLocks noGrp="1"/>
+          </p:cNvSpPr>
+          <p:nvPr>
+            <p:ph type="body" idx="1"/>
+          </p:nvPr>
+        </p:nvSpPr>
+        <p:spPr/>
+        <p:txBody>
+          <a:bodyPr/>
+          <a:lstStyle/>
+          <a:p>
+            <a:r>
+              <a:rPr dirty="0"/>
+              <a:t>一般配体的端到端区域检出与身份识别</a:t>
+            </a:r>
+            <a:r>
+              <a:rPr lang="zh-CN" altLang="en-US" dirty="0"/>
+              <a:t>。图中展示了 </a:t>
+            </a:r>
+            <a:r>
+              <a:rPr dirty="0"/>
+              <a:t>179 </a:t>
+            </a:r>
+            <a:r>
+              <a:rPr dirty="0" err="1"/>
+              <a:t>个测试</a:t>
+            </a:r>
+            <a:r>
+              <a:rPr dirty="0"/>
+              <a:t> PDB </a:t>
+            </a:r>
+            <a:r>
+              <a:rPr lang="zh-CN" altLang="en-US" dirty="0"/>
+              <a:t>在</a:t>
+            </a:r>
+            <a:r>
+              <a:rPr dirty="0"/>
+              <a:t> K </a:t>
+            </a:r>
+            <a:r>
+              <a:rPr dirty="0" err="1"/>
+              <a:t>次尝试</a:t>
+            </a:r>
+            <a:r>
+              <a:rPr lang="zh-CN" altLang="en-US" dirty="0"/>
+              <a:t>预算下</a:t>
+            </a:r>
+            <a:r>
+              <a:rPr dirty="0" err="1"/>
+              <a:t>成功</a:t>
+            </a:r>
+            <a:r>
+              <a:rPr lang="zh-CN" altLang="en-US" dirty="0"/>
+              <a:t>的 </a:t>
+            </a:r>
+            <a:r>
+              <a:rPr lang="en-US" dirty="0"/>
+              <a:t>PDB</a:t>
+            </a:r>
+            <a:r>
+              <a:rPr lang="zh-CN" altLang="en-US" dirty="0"/>
+              <a:t> 比例</a:t>
+            </a:r>
+            <a:r>
+              <a:rPr dirty="0"/>
+              <a:t>，K=1–10。Find 和 Emap2lig-Find </a:t>
+            </a:r>
+            <a:r>
+              <a:rPr lang="zh-CN" altLang="en-US" dirty="0"/>
+              <a:t>对应的曲线只考察 </a:t>
+            </a:r>
+            <a:r>
+              <a:rPr lang="en-US" altLang="zh-CN" dirty="0"/>
+              <a:t>Find </a:t>
+            </a:r>
+            <a:r>
+              <a:rPr lang="zh-CN" altLang="en-US" dirty="0"/>
+              <a:t>的预测是否正确，而 </a:t>
+            </a:r>
+            <a:r>
+              <a:rPr dirty="0" err="1"/>
+              <a:t>Find+Match</a:t>
+            </a:r>
+            <a:r>
+              <a:rPr dirty="0"/>
+              <a:t> </a:t>
+            </a:r>
+            <a:r>
+              <a:rPr lang="zh-CN" altLang="en-US" dirty="0"/>
+              <a:t>对应的曲线同时</a:t>
+            </a:r>
+            <a:r>
+              <a:rPr dirty="0" err="1"/>
+              <a:t>要求区域命中且</a:t>
+            </a:r>
+            <a:r>
+              <a:rPr lang="zh-CN" altLang="en-US" dirty="0"/>
+              <a:t>配体</a:t>
+            </a:r>
+            <a:r>
+              <a:rPr dirty="0" err="1"/>
+              <a:t>身份匹配正确。GT</a:t>
+            </a:r>
+            <a:r>
+              <a:rPr dirty="0"/>
+              <a:t> 与 CA2 </a:t>
+            </a:r>
+            <a:r>
+              <a:rPr dirty="0" err="1"/>
+              <a:t>分别</a:t>
+            </a:r>
+            <a:r>
+              <a:rPr lang="zh-CN" altLang="en-US" dirty="0"/>
+              <a:t>表示</a:t>
+            </a:r>
+            <a:r>
+              <a:rPr dirty="0" err="1"/>
+              <a:t>使用真实受体与</a:t>
+            </a:r>
+            <a:r>
+              <a:rPr dirty="0"/>
+              <a:t> CryoAtom2 </a:t>
+            </a:r>
+            <a:r>
+              <a:rPr dirty="0" err="1"/>
+              <a:t>重建受体</a:t>
+            </a:r>
+            <a:r>
+              <a:rPr lang="zh-CN" altLang="en-US" dirty="0"/>
+              <a:t>，</a:t>
+            </a:r>
+            <a:r>
+              <a:rPr dirty="0"/>
+              <a:t>Emap2lig-Find </a:t>
+            </a:r>
+            <a:r>
+              <a:rPr dirty="0" err="1"/>
+              <a:t>不使用受体</a:t>
+            </a:r>
+            <a:r>
+              <a:rPr dirty="0"/>
+              <a:t>。</a:t>
+            </a:r>
+          </a:p>
+          <a:p>
+            <a:r>
+              <a:rPr dirty="0"/>
+              <a:t>ENGLISH:</a:t>
+            </a:r>
+          </a:p>
+          <a:p>
+            <a:r>
+              <a:rPr lang="en-US" dirty="0"/>
+              <a:t>End-to-end ligand-region detection and identity matching. The curves show the percentage of the 179 test PDB entries with successful predictions within an attempt budget of $K=1–10$.  </a:t>
+            </a:r>
+            <a:r>
+              <a:rPr lang="en-US" dirty="0" err="1"/>
+              <a:t>Find+Match</a:t>
+            </a:r>
+            <a:r>
+              <a:rPr lang="en-US" dirty="0"/>
+              <a:t> curves require end-to-end correct region detection and ligand identity matching, whereas Find and Emap2lig-Find curves require only correct region detection. Find and Match denote </a:t>
+            </a:r>
+            <a:r>
+              <a:rPr lang="en-US" dirty="0" err="1"/>
+              <a:t>LigandSeek</a:t>
+            </a:r>
+            <a:r>
+              <a:rPr lang="en-US" dirty="0"/>
+              <a:t>-Find and </a:t>
+            </a:r>
+            <a:r>
+              <a:rPr lang="en-US" dirty="0" err="1"/>
+              <a:t>LigandSeek</a:t>
+            </a:r>
+            <a:r>
+              <a:rPr lang="en-US" dirty="0"/>
+              <a:t>-Match, respectively. GT denotes deposited receptor structures, and CA2 denotes CryoAtom2-reconstructed </a:t>
+            </a:r>
+            <a:r>
+              <a:rPr lang="en-US"/>
+              <a:t>receptor structures.</a:t>
+            </a:r>
+            <a:endParaRPr dirty="0"/>
+          </a:p>
+        </p:txBody>
+      </p:sp>
+      <p:sp>
+        <p:nvSpPr>
+          <p:cNvPr id="4" name="灯片编号占位符 3"/>
+          <p:cNvSpPr>
+            <a:spLocks noGrp="1"/>
+          </p:cNvSpPr>
+          <p:nvPr>
+            <p:ph type="sldNum" sz="quarter" idx="5"/>
+          </p:nvPr>
+        </p:nvSpPr>
+        <p:spPr/>
+        <p:txBody>
+          <a:bodyPr/>
+          <a:lstStyle/>
+          <a:p>
+            <a:fld id="{662628D9-A810-41CF-BA34-6300DD38DA8D}" type="slidenum">
+              <a:rPr lang="zh-CN" altLang="en-US" smtClean="0"/>
+              <a:t>1</a:t>
+            </a:fld>
+            <a:endParaRPr lang="zh-CN" altLang="en-US"/>
+          </a:p>
+        </p:txBody>
+      </p:sp>
+    </p:spTree>
+    <p:extLst>
+      <p:ext uri="{BB962C8B-B14F-4D97-AF65-F5344CB8AC3E}">
+        <p14:creationId xmlns:p14="http://schemas.microsoft.com/office/powerpoint/2010/main" val="3700509861"/>
+      </p:ext>
+    </p:extLst>
+  </p:cSld>
+  <p:clrMapOvr>
+    <a:masterClrMapping/>
+  </p:clrMapOvr>
+</p:notes>
 </file>
 
 <file path=ppt/notesSlides/notesSlide2.xml><?xml version="1.0" encoding="utf-8"?>
-<ns0:notes xmlns:ns0="http://schemas.openxmlformats.org/presentationml/2006/main" xmlns:ns1="http://schemas.openxmlformats.org/drawingml/2006/main" xmlns:ns2="http://schemas.microsoft.com/office/powerpoint/2010/main">
-  <ns0:cSld>
-    <ns0:spTree>
-      <ns0:nvGrpSpPr>
-        <ns0:cNvPr id="1" name=""/>
-        <ns0:cNvGrpSpPr/>
-        <ns0:nvPr/>
-      </ns0:nvGrpSpPr>
-      <ns0:grpSpPr>
-        <ns1:xfrm>
-          <ns1:off x="0" y="0"/>
-          <ns1:ext cx="0" cy="0"/>
-          <ns1:chOff x="0" y="0"/>
-          <ns1:chExt cx="0" cy="0"/>
-        </ns1:xfrm>
-      </ns0:grpSpPr>
-      <ns0:sp>
-        <ns0:nvSpPr>
-          <ns0:cNvPr id="2" name="幻灯片图像占位符 1"/>
-          <ns0:cNvSpPr>
-            <ns1:spLocks noGrp="1" noRot="1" noChangeAspect="1"/>
-          </ns0:cNvSpPr>
-          <ns0:nvPr>
-            <ns0:ph type="sldImg"/>
-          </ns0:nvPr>
-        </ns0:nvSpPr>
-        <ns0:spPr/>
-      </ns0:sp>
-      <ns0:sp>
-        <ns0:nvSpPr>
-          <ns0:cNvPr id="3" name="备注占位符 2"/>
-          <ns0:cNvSpPr>
-            <ns1:spLocks noGrp="1"/>
-          </ns0:cNvSpPr>
-          <ns0:nvPr>
-            <ns0:ph type="body" idx="1"/>
-          </ns0:nvPr>
-        </ns0:nvSpPr>
-        <ns0:spPr/>
-        <ns0:txBody>
-          <ns1:bodyPr/>
-          <ns1:lstStyle/>
-          <ns1:p>
-            <ns1:r>
-              <ns1:rPr dirty="0"/>
-              <ns1:t>单残基无缺失原子的有机小分子的端到端建模。a，</ns1:t>
-            </ns1:r>
-            <ns1:r>
-              <ns1:rPr lang="en-US" altLang="zh-CN" dirty="0"/>
-              <ns1:t>Find </ns1:t>
-            </ns1:r>
-            <ns1:r>
-              <ns1:rPr lang="zh-CN" altLang="en-US" dirty="0"/>
-              <ns1:t>对应的曲线只考察 </ns1:t>
-            </ns1:r>
-            <ns1:r>
-              <ns1:rPr lang="en-US" altLang="zh-CN" dirty="0"/>
-              <ns1:t>Find </ns1:t>
-            </ns1:r>
-            <ns1:r>
-              <ns1:rPr lang="zh-CN" altLang="en-US" dirty="0"/>
-              <ns1:t>的预测是否正确，而 </ns1:t>
-            </ns1:r>
-            <ns1:r>
-              <ns1:rPr dirty="0" err="1"/>
-              <ns1:t>Find+Match</ns1:t>
-            </ns1:r>
-            <ns1:r>
-              <ns1:rPr dirty="0"/>
-              <ns1:t> </ns1:t>
-            </ns1:r>
-            <ns1:r>
-              <ns1:rPr lang="zh-CN" altLang="en-US" dirty="0"/>
-              <ns1:t>对应的曲线要求区域命中且配体身份匹配正确。</ns1:t>
-            </ns1:r>
-            <ns1:r>
-              <ns1:rPr dirty="0" err="1"/>
-              <ns1:t>b、c，分别</ns1:t>
-            </ns1:r>
-            <ns1:r>
-              <ns1:rPr lang="zh-CN" altLang="en-US" dirty="0"/>
-              <ns1:t>显示</ns1:t>
-            </ns1:r>
-            <ns1:r>
-              <ns1:rPr dirty="0"/>
-              <ns1:t>在</ns1:t>
-            </ns1:r>
-            <ns1:r>
-              <ns1:rPr lang="zh-CN" altLang="en-US" dirty="0"/>
-              <ns1:t>真实受体条件下</ns1:t>
-            </ns1:r>
-            <ns1:r>
-              <ns1:rPr dirty="0"/>
-              <ns1:t> 与 </ns1:t>
-            </ns1:r>
-            <ns1:r>
-              <ns1:rPr lang="en-US" dirty="0"/>
-              <ns1:t>CryoAtom2 </ns1:t>
-            </ns1:r>
-            <ns1:r>
-              <ns1:rPr lang="zh-CN" altLang="en-US" dirty="0"/>
-              <ns1:t>重建受体</ns1:t>
-            </ns1:r>
-            <ns1:r>
-              <ns1:rPr dirty="0" err="1"/>
-              <ns1:t>条件下使用</ns1:t>
-            </ns1:r>
-            <ns1:r>
-              <ns1:rPr dirty="0"/>
-              <ns1:t> </ns1:t>
-            </ns1:r>
-            <ns1:r>
-              <ns1:rPr dirty="0" err="1"/>
-              <ns1:t>PocketXMol</ns1:t>
-            </ns1:r>
-            <ns1:r>
-              <ns1:rPr dirty="0"/>
-              <ns1:t>-tuned </ns1:t>
-            </ns1:r>
-            <ns1:r>
-              <ns1:rPr dirty="0" err="1"/>
-              <ns1:t>重建构象</ns1:t>
-            </ns1:r>
-            <ns1:r>
-              <ns1:rPr lang="zh-CN" altLang="en-US" dirty="0"/>
-              <ns1:t>时的 </ns1:t>
-            </ns1:r>
-            <ns1:r>
-              <ns1:rPr lang="en-US" altLang="zh-CN" dirty="0"/>
-              <ns1:t>top-K </ns1:t>
-            </ns1:r>
-            <ns1:r>
-              <ns1:rPr lang="zh-CN" altLang="en-US" dirty="0"/>
-              <ns1:t>成功率</ns1:t>
-            </ns1:r>
-            <ns1:r>
-              <ns1:rPr dirty="0"/>
-              <ns1:t>。</ns1:t>
-            </ns1:r>
-            <ns1:r>
-              <ns1:rPr dirty="0" err="1"/>
-              <ns1:t>实线为</ns1:t>
-            </ns1:r>
-            <ns1:r>
-              <ns1:rPr dirty="0"/>
-              <ns1:t> top-1 </ns1:t>
-            </ns1:r>
-            <ns1:r>
-              <ns1:rPr dirty="0" err="1"/>
-              <ns1:t>pose，虚线为</ns1:t>
-            </ns1:r>
-            <ns1:r>
-              <ns1:rPr dirty="0"/>
-              <ns1:t> best-of-50 </ns1:t>
-            </ns1:r>
-            <ns1:r>
-              <ns1:rPr dirty="0" err="1"/>
-              <ns1:t>pose；成功阈值为重原子</ns1:t>
-            </ns1:r>
-            <ns1:r>
-              <ns1:rPr dirty="0"/>
-              <ns1:t> RMSD &lt;2 Å 或 &lt;3 </ns1:t>
-            </ns1:r>
-            <ns1:r>
-              <ns1:rPr dirty="0" err="1"/>
-              <ns1:t>Å。横轴为计费尝试次数</ns1:t>
-            </ns1:r>
-            <ns1:r>
-              <ns1:rPr dirty="0"/>
-              <ns1:t> </ns1:t>
-            </ns1:r>
-            <ns1:r>
-              <ns1:rPr dirty="0" err="1"/>
-              <ns1:t>K，纵轴</ns1:t>
-            </ns1:r>
-            <ns1:r>
-              <ns1:rPr lang="zh-CN" altLang="en-US" dirty="0"/>
-              <ns1:t>为</ns1:t>
-            </ns1:r>
-            <ns1:r>
-              <ns1:rPr dirty="0"/>
-              <ns1:t> K </ns1:t>
-            </ns1:r>
-            <ns1:r>
-              <ns1:rPr dirty="0" err="1"/>
-              <ns1:t>次尝试</ns1:t>
-            </ns1:r>
-            <ns1:r>
-              <ns1:rPr lang="zh-CN" altLang="en-US" dirty="0"/>
-              <ns1:t>预算下成功</ns1:t>
-            </ns1:r>
-            <ns1:r>
-              <ns1:rPr dirty="0"/>
-              <ns1:t>的 PDB </ns1:t>
-            </ns1:r>
-            <ns1:r>
-              <ns1:rPr dirty="0" err="1"/>
-              <ns1:t>比例。</ns1:t>
-            </ns1:r>
-            <ns1:r>
-              <ns1:rPr lang="en-US" altLang="zh-CN" dirty="0" err="1"/>
-              <ns1:t>GT</ns1:t>
-            </ns1:r>
-            <ns1:r>
-              <ns1:rPr lang="en-US" altLang="zh-CN" dirty="0"/>
-              <ns1:t> </ns1:t>
-            </ns1:r>
-            <ns1:r>
-              <ns1:rPr lang="zh-CN" altLang="en-US" dirty="0"/>
-              <ns1:t>与 </ns1:t>
-            </ns1:r>
-            <ns1:r>
-              <ns1:rPr lang="en-US" altLang="zh-CN" dirty="0"/>
-              <ns1:t>CA2 </ns1:t>
-            </ns1:r>
-            <ns1:r>
-              <ns1:rPr lang="zh-CN" altLang="en-US" dirty="0"/>
-              <ns1:t>分别表示使用真实受体与 </ns1:t>
-            </ns1:r>
-            <ns1:r>
-              <ns1:rPr lang="en-US" altLang="zh-CN" dirty="0"/>
-              <ns1:t>CryoAtom2 </ns1:t>
-            </ns1:r>
-            <ns1:r>
-              <ns1:rPr lang="zh-CN" altLang="en-US" dirty="0"/>
-              <ns1:t>重建受体。</ns1:t>
-            </ns1:r>
-            <ns1:endParaRPr dirty="0"/>
-          </ns1:p>
-          <ns1:p>
-            <ns1:r>
-              <ns1:t>ENGLISH:</ns1:t>
-            </ns1:r>
-          </ns1:p>
-          <ns1:p>
-            <ns1:r>
-              <ns1:t>End-to-end modelling of single-residue organic small molecules with no missing atoms. The evaluation includes 77 PDB entries containing these small molecules. Find and Match denote LigandSeek-Find and LigandSeek-Match, respectively, within the LigandSeek framework.</ns1:t>
-            </ns1:r>
-          </ns1:p>
-          <ns1:p>
-            <ns1:r>
-              <ns1:t>a, Find curves require correct region detection, whereas Find+Match curves require both correct region detection and correct ligand identity matching.</ns1:t>
-            </ns1:r>
-          </ns1:p>
-          <ns1:p>
-            <ns1:r>
-              <ns1:t>b, c, Top-K success rates for pose reconstruction with PocketXMol-tuned using deposited and CryoAtom2-reconstructed receptor structures, respectively. Success requires a heavy-atom root-mean-square deviation (RMSD) below 2 Å or 3 Å. Solid lines show top-1 poses selected by model score; dashed lines show best-of-50 poses, selected as the lowest heavy-atom RMSD among 50 candidates. The horizontal axis shows charged attempts $K$; the vertical axis shows the percentage of PDB entries with successful predictions within that budget. GT and CA2 denote deposited and CryoAtom2-reconstructed receptor structures, respectively.</ns1:t>
-            </ns1:r>
-          </ns1:p>
-        </ns0:txBody>
-      </ns0:sp>
-      <ns0:sp>
-        <ns0:nvSpPr>
-          <ns0:cNvPr id="4" name="灯片编号占位符 3"/>
-          <ns0:cNvSpPr>
-            <ns1:spLocks noGrp="1"/>
-          </ns0:cNvSpPr>
-          <ns0:nvPr>
-            <ns0:ph type="sldNum" sz="quarter" idx="5"/>
-          </ns0:nvPr>
-        </ns0:nvSpPr>
-        <ns0:spPr/>
-        <ns0:txBody>
-          <ns1:bodyPr/>
-          <ns1:lstStyle/>
-          <ns1:p>
-            <ns1:fld id="{8DDC8409-929D-466A-A2CD-CAE0966F44C1}" type="slidenum">
-              <ns1:rPr lang="zh-CN" altLang="en-US" smtClean="0"/>
-              <ns1:t>2</ns1:t>
-            </ns1:fld>
-            <ns1:endParaRPr lang="zh-CN" altLang="en-US"/>
-          </ns1:p>
-        </ns0:txBody>
-      </ns0:sp>
-    </ns0:spTree>
-    <ns0:extLst>
-      <ns0:ext uri="{BB962C8B-B14F-4D97-AF65-F5344CB8AC3E}">
-        <ns2:creationId val="1270214165"/>
-      </ns0:ext>
-    </ns0:extLst>
-  </ns0:cSld>
-  <ns0:clrMapOvr>
-    <ns1:masterClrMapping/>
-  </ns0:clrMapOvr>
-</ns0:notes>
+<p:notes xmlns:a="http://schemas.openxmlformats.org/drawingml/2006/main" xmlns:r="http://schemas.openxmlformats.org/officeDocument/2006/relationships" xmlns:p="http://schemas.openxmlformats.org/presentationml/2006/main">
+  <p:cSld>
+    <p:spTree>
+      <p:nvGrpSpPr>
+        <p:cNvPr id="1" name=""/>
+        <p:cNvGrpSpPr/>
+        <p:nvPr/>
+      </p:nvGrpSpPr>
+      <p:grpSpPr>
+        <a:xfrm>
+          <a:off x="0" y="0"/>
+          <a:ext cx="0" cy="0"/>
+          <a:chOff x="0" y="0"/>
+          <a:chExt cx="0" cy="0"/>
+        </a:xfrm>
+      </p:grpSpPr>
+      <p:sp>
+        <p:nvSpPr>
+          <p:cNvPr id="2" name="幻灯片图像占位符 1"/>
+          <p:cNvSpPr>
+            <a:spLocks noGrp="1" noRot="1" noChangeAspect="1"/>
+          </p:cNvSpPr>
+          <p:nvPr>
+            <p:ph type="sldImg"/>
+          </p:nvPr>
+        </p:nvSpPr>
+        <p:spPr/>
+      </p:sp>
+      <p:sp>
+        <p:nvSpPr>
+          <p:cNvPr id="3" name="备注占位符 2"/>
+          <p:cNvSpPr>
+            <a:spLocks noGrp="1"/>
+          </p:cNvSpPr>
+          <p:nvPr>
+            <p:ph type="body" idx="1"/>
+          </p:nvPr>
+        </p:nvSpPr>
+        <p:spPr/>
+        <p:txBody>
+          <a:bodyPr/>
+          <a:lstStyle/>
+          <a:p>
+            <a:r>
+              <a:rPr dirty="0"/>
+              <a:t>单残基无缺失原子的有机小分子的端到端建模。a，</a:t>
+            </a:r>
+            <a:r>
+              <a:rPr lang="en-US" altLang="zh-CN" dirty="0"/>
+              <a:t>Find </a:t>
+            </a:r>
+            <a:r>
+              <a:rPr lang="zh-CN" altLang="en-US" dirty="0"/>
+              <a:t>对应的曲线只考察 </a:t>
+            </a:r>
+            <a:r>
+              <a:rPr lang="en-US" altLang="zh-CN" dirty="0"/>
+              <a:t>Find </a:t>
+            </a:r>
+            <a:r>
+              <a:rPr lang="zh-CN" altLang="en-US" dirty="0"/>
+              <a:t>的预测是否正确，而 </a:t>
+            </a:r>
+            <a:r>
+              <a:rPr dirty="0" err="1"/>
+              <a:t>Find+Match</a:t>
+            </a:r>
+            <a:r>
+              <a:rPr dirty="0"/>
+              <a:t> </a:t>
+            </a:r>
+            <a:r>
+              <a:rPr lang="zh-CN" altLang="en-US" dirty="0"/>
+              <a:t>对应的曲线要求区域命中且配体身份匹配正确。</a:t>
+            </a:r>
+            <a:r>
+              <a:rPr dirty="0" err="1"/>
+              <a:t>b、c，分别</a:t>
+            </a:r>
+            <a:r>
+              <a:rPr lang="zh-CN" altLang="en-US" dirty="0"/>
+              <a:t>显示</a:t>
+            </a:r>
+            <a:r>
+              <a:rPr dirty="0"/>
+              <a:t>在</a:t>
+            </a:r>
+            <a:r>
+              <a:rPr lang="zh-CN" altLang="en-US" dirty="0"/>
+              <a:t>真实受体条件下</a:t>
+            </a:r>
+            <a:r>
+              <a:rPr dirty="0"/>
+              <a:t> 与 </a:t>
+            </a:r>
+            <a:r>
+              <a:rPr lang="en-US" dirty="0"/>
+              <a:t>CryoAtom2 </a:t>
+            </a:r>
+            <a:r>
+              <a:rPr lang="zh-CN" altLang="en-US" dirty="0"/>
+              <a:t>重建受体</a:t>
+            </a:r>
+            <a:r>
+              <a:rPr dirty="0" err="1"/>
+              <a:t>条件下使用</a:t>
+            </a:r>
+            <a:r>
+              <a:rPr dirty="0"/>
+              <a:t> </a:t>
+            </a:r>
+            <a:r>
+              <a:rPr dirty="0" err="1"/>
+              <a:t>PocketXMol</a:t>
+            </a:r>
+            <a:r>
+              <a:rPr dirty="0"/>
+              <a:t>-tuned </a:t>
+            </a:r>
+            <a:r>
+              <a:rPr dirty="0" err="1"/>
+              <a:t>重建构象</a:t>
+            </a:r>
+            <a:r>
+              <a:rPr lang="zh-CN" altLang="en-US" dirty="0"/>
+              <a:t>时的 </a:t>
+            </a:r>
+            <a:r>
+              <a:rPr lang="en-US" altLang="zh-CN" dirty="0"/>
+              <a:t>top-K </a:t>
+            </a:r>
+            <a:r>
+              <a:rPr lang="zh-CN" altLang="en-US" dirty="0"/>
+              <a:t>成功率</a:t>
+            </a:r>
+            <a:r>
+              <a:rPr dirty="0"/>
+              <a:t>。</a:t>
+            </a:r>
+            <a:r>
+              <a:rPr dirty="0" err="1"/>
+              <a:t>实线为</a:t>
+            </a:r>
+            <a:r>
+              <a:rPr dirty="0"/>
+              <a:t> top-1 </a:t>
+            </a:r>
+            <a:r>
+              <a:rPr dirty="0" err="1"/>
+              <a:t>pose，虚线为</a:t>
+            </a:r>
+            <a:r>
+              <a:rPr dirty="0"/>
+              <a:t> best-of-50 </a:t>
+            </a:r>
+            <a:r>
+              <a:rPr dirty="0" err="1"/>
+              <a:t>pose；成功阈值为重原子</a:t>
+            </a:r>
+            <a:r>
+              <a:rPr dirty="0"/>
+              <a:t> RMSD &lt;2 Å 或 &lt;3 </a:t>
+            </a:r>
+            <a:r>
+              <a:rPr dirty="0" err="1"/>
+              <a:t>Å。横轴为计费尝试次数</a:t>
+            </a:r>
+            <a:r>
+              <a:rPr dirty="0"/>
+              <a:t> </a:t>
+            </a:r>
+            <a:r>
+              <a:rPr dirty="0" err="1"/>
+              <a:t>K，纵轴</a:t>
+            </a:r>
+            <a:r>
+              <a:rPr lang="zh-CN" altLang="en-US" dirty="0"/>
+              <a:t>为</a:t>
+            </a:r>
+            <a:r>
+              <a:rPr dirty="0"/>
+              <a:t> K </a:t>
+            </a:r>
+            <a:r>
+              <a:rPr dirty="0" err="1"/>
+              <a:t>次尝试</a:t>
+            </a:r>
+            <a:r>
+              <a:rPr lang="zh-CN" altLang="en-US" dirty="0"/>
+              <a:t>预算下成功</a:t>
+            </a:r>
+            <a:r>
+              <a:rPr dirty="0"/>
+              <a:t>的 PDB </a:t>
+            </a:r>
+            <a:r>
+              <a:rPr dirty="0" err="1"/>
+              <a:t>比例。</a:t>
+            </a:r>
+            <a:r>
+              <a:rPr lang="en-US" altLang="zh-CN" dirty="0" err="1"/>
+              <a:t>GT</a:t>
+            </a:r>
+            <a:r>
+              <a:rPr lang="en-US" altLang="zh-CN" dirty="0"/>
+              <a:t> </a:t>
+            </a:r>
+            <a:r>
+              <a:rPr lang="zh-CN" altLang="en-US" dirty="0"/>
+              <a:t>与 </a:t>
+            </a:r>
+            <a:r>
+              <a:rPr lang="en-US" altLang="zh-CN" dirty="0"/>
+              <a:t>CA2 </a:t>
+            </a:r>
+            <a:r>
+              <a:rPr lang="zh-CN" altLang="en-US" dirty="0"/>
+              <a:t>分别表示使用真实受体与 </a:t>
+            </a:r>
+            <a:r>
+              <a:rPr lang="en-US" altLang="zh-CN" dirty="0"/>
+              <a:t>CryoAtom2 </a:t>
+            </a:r>
+            <a:r>
+              <a:rPr lang="zh-CN" altLang="en-US" dirty="0"/>
+              <a:t>重建受体。</a:t>
+            </a:r>
+            <a:endParaRPr dirty="0"/>
+          </a:p>
+          <a:p>
+            <a:r>
+              <a:rPr dirty="0"/>
+              <a:t>ENGLISH:</a:t>
+            </a:r>
+          </a:p>
+          <a:p>
+            <a:r>
+              <a:rPr dirty="0"/>
+              <a:t>End-to-end modelling of single-residue organic small molecules with no missing atoms. The evaluation includes 77 PDB entries containing these small molecules. Find and Match denote </a:t>
+            </a:r>
+            <a:r>
+              <a:rPr dirty="0" err="1"/>
+              <a:t>LigandSeek</a:t>
+            </a:r>
+            <a:r>
+              <a:rPr dirty="0"/>
+              <a:t>-Find and </a:t>
+            </a:r>
+            <a:r>
+              <a:rPr dirty="0" err="1"/>
+              <a:t>LigandSeek</a:t>
+            </a:r>
+            <a:r>
+              <a:rPr dirty="0"/>
+              <a:t>-Match, respectively, within the </a:t>
+            </a:r>
+            <a:r>
+              <a:rPr dirty="0" err="1"/>
+              <a:t>LigandSeek</a:t>
+            </a:r>
+            <a:r>
+              <a:rPr dirty="0"/>
+              <a:t> framework.</a:t>
+            </a:r>
+          </a:p>
+          <a:p>
+            <a:r>
+              <a:rPr dirty="0"/>
+              <a:t>a, Find curves require correct region detection, whereas </a:t>
+            </a:r>
+            <a:r>
+              <a:rPr dirty="0" err="1"/>
+              <a:t>Find+Match</a:t>
+            </a:r>
+            <a:r>
+              <a:rPr dirty="0"/>
+              <a:t> curves require both correct region detection and correct ligand identity matching.</a:t>
+            </a:r>
+          </a:p>
+          <a:p>
+            <a:r>
+              <a:rPr dirty="0"/>
+              <a:t>b, c, Top-K success rates for pose reconstruction with </a:t>
+            </a:r>
+            <a:r>
+              <a:rPr dirty="0" err="1"/>
+              <a:t>PocketXMol</a:t>
+            </a:r>
+            <a:r>
+              <a:rPr dirty="0"/>
+              <a:t>-tuned using deposited and CryoAtom2-reconstructed receptor structures, respectively. Success requires a heavy-atom root-mean-square deviation (RMSD) below 2 Å or 3 Å. Solid lines show top-1 poses selected by model score; dashed lines show best-of-50 poses, selected as the lowest heavy-atom RMSD among 50 candidates. The horizontal axis shows charged attempts $K$; the vertical axis shows the percentage of PDB entries with successful predictions within that budget. GT and CA2 denote deposited and CryoAtom2-reconstructed receptor structures, respectively.</a:t>
+            </a:r>
+          </a:p>
+        </p:txBody>
+      </p:sp>
+      <p:sp>
+        <p:nvSpPr>
+          <p:cNvPr id="4" name="灯片编号占位符 3"/>
+          <p:cNvSpPr>
+            <a:spLocks noGrp="1"/>
+          </p:cNvSpPr>
+          <p:nvPr>
+            <p:ph type="sldNum" sz="quarter" idx="5"/>
+          </p:nvPr>
+        </p:nvSpPr>
+        <p:spPr/>
+        <p:txBody>
+          <a:bodyPr/>
+          <a:lstStyle/>
+          <a:p>
+            <a:fld id="{8DDC8409-929D-466A-A2CD-CAE0966F44C1}" type="slidenum">
+              <a:rPr lang="zh-CN" altLang="en-US" smtClean="0"/>
+              <a:t>2</a:t>
+            </a:fld>
+            <a:endParaRPr lang="zh-CN" altLang="en-US"/>
+          </a:p>
+        </p:txBody>
+      </p:sp>
+    </p:spTree>
+    <p:extLst>
+      <p:ext uri="{BB962C8B-B14F-4D97-AF65-F5344CB8AC3E}">
+        <p14:creationId xmlns:p14="http://schemas.microsoft.com/office/powerpoint/2010/main" val="1270214165"/>
+      </p:ext>
+    </p:extLst>
+  </p:cSld>
+  <p:clrMapOvr>
+    <a:masterClrMapping/>
+  </p:clrMapOvr>
+</p:notes>
 </file>
 
 <file path=ppt/slideLayouts/slideLayout1.xml><?xml version="1.0" encoding="utf-8"?>
@@ -1209,7 +1284,7 @@
           <a:p>
             <a:fld id="{BBD0DB63-4F77-4091-A4E7-5235D19CF263}" type="datetimeFigureOut">
               <a:rPr lang="zh-CN" altLang="en-US" smtClean="0"/>
-              <a:t>2026/10/4</a:t>
+              <a:t>2026/10/7</a:t>
             </a:fld>
             <a:endParaRPr lang="zh-CN" altLang="en-US"/>
           </a:p>
@@ -1407,7 +1482,7 @@
           <a:p>
             <a:fld id="{BBD0DB63-4F77-4091-A4E7-5235D19CF263}" type="datetimeFigureOut">
               <a:rPr lang="zh-CN" altLang="en-US" smtClean="0"/>
-              <a:t>2026/10/4</a:t>
+              <a:t>2026/10/7</a:t>
             </a:fld>
             <a:endParaRPr lang="zh-CN" altLang="en-US"/>
           </a:p>
@@ -1615,7 +1690,7 @@
           <a:p>
             <a:fld id="{BBD0DB63-4F77-4091-A4E7-5235D19CF263}" type="datetimeFigureOut">
               <a:rPr lang="zh-CN" altLang="en-US" smtClean="0"/>
-              <a:t>2026/10/4</a:t>
+              <a:t>2026/10/7</a:t>
             </a:fld>
             <a:endParaRPr lang="zh-CN" altLang="en-US"/>
           </a:p>
@@ -1813,7 +1888,7 @@
           <a:p>
             <a:fld id="{BBD0DB63-4F77-4091-A4E7-5235D19CF263}" type="datetimeFigureOut">
               <a:rPr lang="zh-CN" altLang="en-US" smtClean="0"/>
-              <a:t>2026/10/4</a:t>
+              <a:t>2026/10/7</a:t>
             </a:fld>
             <a:endParaRPr lang="zh-CN" altLang="en-US"/>
           </a:p>
@@ -2088,7 +2163,7 @@
           <a:p>
             <a:fld id="{BBD0DB63-4F77-4091-A4E7-5235D19CF263}" type="datetimeFigureOut">
               <a:rPr lang="zh-CN" altLang="en-US" smtClean="0"/>
-              <a:t>2026/10/4</a:t>
+              <a:t>2026/10/7</a:t>
             </a:fld>
             <a:endParaRPr lang="zh-CN" altLang="en-US"/>
           </a:p>
@@ -2353,7 +2428,7 @@
           <a:p>
             <a:fld id="{BBD0DB63-4F77-4091-A4E7-5235D19CF263}" type="datetimeFigureOut">
               <a:rPr lang="zh-CN" altLang="en-US" smtClean="0"/>
-              <a:t>2026/10/4</a:t>
+              <a:t>2026/10/7</a:t>
             </a:fld>
             <a:endParaRPr lang="zh-CN" altLang="en-US"/>
           </a:p>
@@ -2765,7 +2840,7 @@
           <a:p>
             <a:fld id="{BBD0DB63-4F77-4091-A4E7-5235D19CF263}" type="datetimeFigureOut">
               <a:rPr lang="zh-CN" altLang="en-US" smtClean="0"/>
-              <a:t>2026/10/4</a:t>
+              <a:t>2026/10/7</a:t>
             </a:fld>
             <a:endParaRPr lang="zh-CN" altLang="en-US"/>
           </a:p>
@@ -2906,7 +2981,7 @@
           <a:p>
             <a:fld id="{BBD0DB63-4F77-4091-A4E7-5235D19CF263}" type="datetimeFigureOut">
               <a:rPr lang="zh-CN" altLang="en-US" smtClean="0"/>
-              <a:t>2026/10/4</a:t>
+              <a:t>2026/10/7</a:t>
             </a:fld>
             <a:endParaRPr lang="zh-CN" altLang="en-US"/>
           </a:p>
@@ -3019,7 +3094,7 @@
           <a:p>
             <a:fld id="{BBD0DB63-4F77-4091-A4E7-5235D19CF263}" type="datetimeFigureOut">
               <a:rPr lang="zh-CN" altLang="en-US" smtClean="0"/>
-              <a:t>2026/10/4</a:t>
+              <a:t>2026/10/7</a:t>
             </a:fld>
             <a:endParaRPr lang="zh-CN" altLang="en-US"/>
           </a:p>
@@ -3330,7 +3405,7 @@
           <a:p>
             <a:fld id="{BBD0DB63-4F77-4091-A4E7-5235D19CF263}" type="datetimeFigureOut">
               <a:rPr lang="zh-CN" altLang="en-US" smtClean="0"/>
-              <a:t>2026/10/4</a:t>
+              <a:t>2026/10/7</a:t>
             </a:fld>
             <a:endParaRPr lang="zh-CN" altLang="en-US"/>
           </a:p>
@@ -3618,7 +3693,7 @@
           <a:p>
             <a:fld id="{BBD0DB63-4F77-4091-A4E7-5235D19CF263}" type="datetimeFigureOut">
               <a:rPr lang="zh-CN" altLang="en-US" smtClean="0"/>
-              <a:t>2026/10/4</a:t>
+              <a:t>2026/10/7</a:t>
             </a:fld>
             <a:endParaRPr lang="zh-CN" altLang="en-US"/>
           </a:p>
@@ -3859,7 +3934,7 @@
           <a:p>
             <a:fld id="{BBD0DB63-4F77-4091-A4E7-5235D19CF263}" type="datetimeFigureOut">
               <a:rPr lang="zh-CN" altLang="en-US" smtClean="0"/>
-              <a:t>2026/10/4</a:t>
+              <a:t>2026/10/7</a:t>
             </a:fld>
             <a:endParaRPr lang="zh-CN" altLang="en-US"/>
           </a:p>

--- a/画图/E2E结果.pptx
+++ b/画图/E2E结果.pptx
@@ -282,7 +282,7 @@
           <a:p>
             <a:fld id="{E1A40E6D-81F6-4F1C-843E-41060F95F2BE}" type="datetimeFigureOut">
               <a:rPr lang="zh-CN" altLang="en-US" smtClean="0"/>
-              <a:t>2026/10/8</a:t>
+              <a:t>2026/10/14</a:t>
             </a:fld>
             <a:endParaRPr lang="zh-CN" altLang="en-US"/>
           </a:p>
@@ -593,12 +593,14 @@
           <a:bodyPr/>
           <a:lstStyle/>
           <a:p>
-            <a:pPr/>
             <a:r>
               <a:rPr lang="zh-CN" dirty="0"/>
               <a:t>端到端配体区域检出与身份匹配。曲线展示在尝试预算 $K=1–10$ 内，179 个测试 PDB 中预测成功的比例。Find+Match 曲线要求端到端区域检出和配体身份匹配均正确，Find 和 Emap2lig-Find 曲线仅要求区域检出正确。Find 和 Match 分别指 LigandSeek-Find 和 LigandSeek-Match。GT 表示真实受体结构，CA2 表示 CryoAtom2 重建受体结构。</a:t>
             </a:r>
-            <a:endParaRPr lang="zh-CN"/>
+            <a:endParaRPr lang="en-US" altLang="zh-CN" dirty="0"/>
+          </a:p>
+          <a:p>
+            <a:endParaRPr lang="zh-CN" dirty="0"/>
           </a:p>
           <a:p>
             <a:r>
@@ -719,28 +721,48 @@
           <a:bodyPr/>
           <a:lstStyle/>
           <a:p>
-            <a:pPr/>
             <a:r>
               <a:rPr lang="zh-CN" dirty="0"/>
               <a:t>单残基、无缺失原子的有机小分子端到端建模。曲线展示在尝试预算 $K = 1–10$ 内，77 个测试 PDB 中预测成功的比例。Find 和 Match 分别指 LigandSeek-Find 和 LigandSeek-Match。GT 和 CA2 分别表示真实受体结构和 CryoAtom2 重建受体结构。</a:t>
             </a:r>
-            <a:endParaRPr lang="zh-CN"/>
           </a:p>
           <a:p>
-            <a:pPr/>
+            <a:r>
+              <a:rPr lang="en-US" altLang="zh-CN" sz="1200" b="1" kern="1200" dirty="0">
+                <a:solidFill>
+                  <a:schemeClr val="tx1"/>
+                </a:solidFill>
+                <a:latin typeface="+mn-lt"/>
+                <a:ea typeface="+mn-ea"/>
+                <a:cs typeface="+mn-cs"/>
+              </a:rPr>
+              <a:t>a, </a:t>
+            </a:r>
             <a:r>
               <a:rPr lang="zh-CN" dirty="0"/>
-              <a:t>a, Find+Match 曲线要求端到端区域检出和配体身份匹配均正确，Find 和 Emap2lig-Find 曲线仅要求区域检出正确。</a:t>
+              <a:t>Find+Match 曲线要求端到端区域检出和配体身份匹配均正确，Find 和 Emap2lig-Find 曲线仅要求区域检出正确。</a:t>
             </a:r>
-            <a:endParaRPr lang="zh-CN"/>
           </a:p>
           <a:p>
-            <a:pPr/>
+            <a:r>
+              <a:rPr lang="en-US" altLang="zh-CN" sz="1200" b="1" kern="1200" dirty="0">
+                <a:solidFill>
+                  <a:schemeClr val="tx1"/>
+                </a:solidFill>
+                <a:latin typeface="+mn-lt"/>
+                <a:ea typeface="+mn-ea"/>
+                <a:cs typeface="+mn-cs"/>
+              </a:rPr>
+              <a:t>b, c, </a:t>
+            </a:r>
             <a:r>
               <a:rPr lang="zh-CN" dirty="0"/>
-              <a:t>b, c, 使用 PocketXMol-tuned 进行端到端构象重建时，成功率随计费尝试次数 $K$ 的变化，分别展示真实受体（GT，b）和 CryoAtom2 重建受体（CA2，c）条件。成功要求 RMSD 低于 2 Å 或 3 Å。实线表示按模型评分选出的 top-1 构象，虚线表示 best-of-50 构象。</a:t>
+              <a:t>使用 PocketXMol-tuned 进行端到端构象重建时，成功率随计费尝试次数 $K$ 的变化，分别展示真实受体（GT，b）和 CryoAtom2 重建受体（CA2，c）条件。成功要求 RMSD 低于 2 Å 或 3 Å。实线表示按模型评分选出的 top-1 构象，虚线表示 best-of-50 构象。</a:t>
             </a:r>
-            <a:endParaRPr lang="zh-CN"/>
+            <a:endParaRPr lang="en-US" altLang="zh-CN" dirty="0"/>
+          </a:p>
+          <a:p>
+            <a:endParaRPr lang="zh-CN" dirty="0"/>
           </a:p>
           <a:p>
             <a:r>
@@ -772,7 +794,14 @@
           </a:p>
           <a:p>
             <a:r>
-              <a:rPr lang="en-US" dirty="0"/>
+              <a:rPr lang="en-US" sz="1200" b="1" kern="1200" dirty="0">
+                <a:solidFill>
+                  <a:schemeClr val="tx1"/>
+                </a:solidFill>
+                <a:latin typeface="+mn-lt"/>
+                <a:ea typeface="+mn-ea"/>
+                <a:cs typeface="+mn-cs"/>
+              </a:rPr>
               <a:t>a, </a:t>
             </a:r>
             <a:r>
@@ -786,8 +815,19 @@
           </a:p>
           <a:p>
             <a:r>
+              <a:rPr lang="en-US" sz="1200" b="1" kern="1200" dirty="0">
+                <a:solidFill>
+                  <a:schemeClr val="tx1"/>
+                </a:solidFill>
+                <a:latin typeface="+mn-lt"/>
+                <a:ea typeface="+mn-ea"/>
+                <a:cs typeface="+mn-cs"/>
+              </a:rPr>
+              <a:t>b, c, </a:t>
+            </a:r>
+            <a:r>
               <a:rPr lang="en-US" dirty="0"/>
-              <a:t>b, c, Success rates for end-to-end pose reconstruction with </a:t>
+              <a:t>Success rates for end-to-end pose reconstruction with </a:t>
             </a:r>
             <a:r>
               <a:rPr lang="en-US" dirty="0" err="1"/>
@@ -984,7 +1024,7 @@
           <a:p>
             <a:fld id="{BBD0DB63-4F77-4091-A4E7-5235D19CF263}" type="datetimeFigureOut">
               <a:rPr lang="zh-CN" altLang="en-US" smtClean="0"/>
-              <a:t>2026/10/8</a:t>
+              <a:t>2026/10/14</a:t>
             </a:fld>
             <a:endParaRPr lang="zh-CN" altLang="en-US"/>
           </a:p>
@@ -1182,7 +1222,7 @@
           <a:p>
             <a:fld id="{BBD0DB63-4F77-4091-A4E7-5235D19CF263}" type="datetimeFigureOut">
               <a:rPr lang="zh-CN" altLang="en-US" smtClean="0"/>
-              <a:t>2026/10/8</a:t>
+              <a:t>2026/10/14</a:t>
             </a:fld>
             <a:endParaRPr lang="zh-CN" altLang="en-US"/>
           </a:p>
@@ -1390,7 +1430,7 @@
           <a:p>
             <a:fld id="{BBD0DB63-4F77-4091-A4E7-5235D19CF263}" type="datetimeFigureOut">
               <a:rPr lang="zh-CN" altLang="en-US" smtClean="0"/>
-              <a:t>2026/10/8</a:t>
+              <a:t>2026/10/14</a:t>
             </a:fld>
             <a:endParaRPr lang="zh-CN" altLang="en-US"/>
           </a:p>
@@ -1588,7 +1628,7 @@
           <a:p>
             <a:fld id="{BBD0DB63-4F77-4091-A4E7-5235D19CF263}" type="datetimeFigureOut">
               <a:rPr lang="zh-CN" altLang="en-US" smtClean="0"/>
-              <a:t>2026/10/8</a:t>
+              <a:t>2026/10/14</a:t>
             </a:fld>
             <a:endParaRPr lang="zh-CN" altLang="en-US"/>
           </a:p>
@@ -1863,7 +1903,7 @@
           <a:p>
             <a:fld id="{BBD0DB63-4F77-4091-A4E7-5235D19CF263}" type="datetimeFigureOut">
               <a:rPr lang="zh-CN" altLang="en-US" smtClean="0"/>
-              <a:t>2026/10/8</a:t>
+              <a:t>2026/10/14</a:t>
             </a:fld>
             <a:endParaRPr lang="zh-CN" altLang="en-US"/>
           </a:p>
@@ -2128,7 +2168,7 @@
           <a:p>
             <a:fld id="{BBD0DB63-4F77-4091-A4E7-5235D19CF263}" type="datetimeFigureOut">
               <a:rPr lang="zh-CN" altLang="en-US" smtClean="0"/>
-              <a:t>2026/10/8</a:t>
+              <a:t>2026/10/14</a:t>
             </a:fld>
             <a:endParaRPr lang="zh-CN" altLang="en-US"/>
           </a:p>
@@ -2540,7 +2580,7 @@
           <a:p>
             <a:fld id="{BBD0DB63-4F77-4091-A4E7-5235D19CF263}" type="datetimeFigureOut">
               <a:rPr lang="zh-CN" altLang="en-US" smtClean="0"/>
-              <a:t>2026/10/8</a:t>
+              <a:t>2026/10/14</a:t>
             </a:fld>
             <a:endParaRPr lang="zh-CN" altLang="en-US"/>
           </a:p>
@@ -2681,7 +2721,7 @@
           <a:p>
             <a:fld id="{BBD0DB63-4F77-4091-A4E7-5235D19CF263}" type="datetimeFigureOut">
               <a:rPr lang="zh-CN" altLang="en-US" smtClean="0"/>
-              <a:t>2026/10/8</a:t>
+              <a:t>2026/10/14</a:t>
             </a:fld>
             <a:endParaRPr lang="zh-CN" altLang="en-US"/>
           </a:p>
@@ -2794,7 +2834,7 @@
           <a:p>
             <a:fld id="{BBD0DB63-4F77-4091-A4E7-5235D19CF263}" type="datetimeFigureOut">
               <a:rPr lang="zh-CN" altLang="en-US" smtClean="0"/>
-              <a:t>2026/10/8</a:t>
+              <a:t>2026/10/14</a:t>
             </a:fld>
             <a:endParaRPr lang="zh-CN" altLang="en-US"/>
           </a:p>
@@ -3105,7 +3145,7 @@
           <a:p>
             <a:fld id="{BBD0DB63-4F77-4091-A4E7-5235D19CF263}" type="datetimeFigureOut">
               <a:rPr lang="zh-CN" altLang="en-US" smtClean="0"/>
-              <a:t>2026/10/8</a:t>
+              <a:t>2026/10/14</a:t>
             </a:fld>
             <a:endParaRPr lang="zh-CN" altLang="en-US"/>
           </a:p>
@@ -3393,7 +3433,7 @@
           <a:p>
             <a:fld id="{BBD0DB63-4F77-4091-A4E7-5235D19CF263}" type="datetimeFigureOut">
               <a:rPr lang="zh-CN" altLang="en-US" smtClean="0"/>
-              <a:t>2026/10/8</a:t>
+              <a:t>2026/10/14</a:t>
             </a:fld>
             <a:endParaRPr lang="zh-CN" altLang="en-US"/>
           </a:p>
@@ -3634,7 +3674,7 @@
           <a:p>
             <a:fld id="{BBD0DB63-4F77-4091-A4E7-5235D19CF263}" type="datetimeFigureOut">
               <a:rPr lang="zh-CN" altLang="en-US" smtClean="0"/>
-              <a:t>2026/10/8</a:t>
+              <a:t>2026/10/14</a:t>
             </a:fld>
             <a:endParaRPr lang="zh-CN" altLang="en-US"/>
           </a:p>
